--- a/ClinicalTrials_KG_LinkedIn_v2.pptx
+++ b/ClinicalTrials_KG_LinkedIn_v2.pptx
@@ -17,12 +17,15 @@
     <p:sldId id="275" r:id="rId11"/>
     <p:sldId id="270" r:id="rId12"/>
     <p:sldId id="276" r:id="rId13"/>
-    <p:sldId id="271" r:id="rId14"/>
-    <p:sldId id="262" r:id="rId15"/>
-    <p:sldId id="265" r:id="rId16"/>
-    <p:sldId id="261" r:id="rId17"/>
-    <p:sldId id="263" r:id="rId18"/>
-    <p:sldId id="264" r:id="rId19"/>
+    <p:sldId id="277" r:id="rId14"/>
+    <p:sldId id="278" r:id="rId15"/>
+    <p:sldId id="279" r:id="rId16"/>
+    <p:sldId id="271" r:id="rId17"/>
+    <p:sldId id="262" r:id="rId18"/>
+    <p:sldId id="265" r:id="rId19"/>
+    <p:sldId id="261" r:id="rId20"/>
+    <p:sldId id="263" r:id="rId21"/>
+    <p:sldId id="264" r:id="rId22"/>
   </p:sldIdLst>
   <p:sldSz cx="9144000" cy="5143500" type="screen16x9"/>
   <p:notesSz cx="6858000" cy="9144000"/>
@@ -7521,61 +7524,6 @@
       </p:sp>
       <p:sp>
         <p:nvSpPr>
-          <p:cNvPr id="13" name="TextBox 12"/>
-          <p:cNvSpPr txBox="1"/>
-          <p:nvPr/>
-        </p:nvSpPr>
-        <p:spPr>
-          <a:xfrm>
-            <a:off x="3096321" y="1624455"/>
-            <a:ext cx="2743201" cy="246221"/>
-          </a:xfrm>
-          <a:prstGeom prst="rect">
-            <a:avLst/>
-          </a:prstGeom>
-          <a:noFill/>
-        </p:spPr>
-        <p:txBody>
-          <a:bodyPr wrap="square">
-            <a:spAutoFit/>
-          </a:bodyPr>
-          <a:lstStyle/>
-          <a:p>
-            <a:r>
-              <a:rPr lang="en-IN" sz="1000" dirty="0">
-                <a:solidFill>
-                  <a:schemeClr val="tx1">
-                    <a:lumMod val="50000"/>
-                    <a:lumOff val="50000"/>
-                  </a:schemeClr>
-                </a:solidFill>
-              </a:rPr>
-              <a:t>Clinical Informatics  ·  Graph AI  · </a:t>
-            </a:r>
-            <a:r>
-              <a:rPr lang="en-IN" sz="1000" i="1" dirty="0">
-                <a:solidFill>
-                  <a:schemeClr val="tx1">
-                    <a:lumMod val="50000"/>
-                    <a:lumOff val="50000"/>
-                  </a:schemeClr>
-                </a:solidFill>
-              </a:rPr>
-              <a:t>Neo4j graph DB</a:t>
-            </a:r>
-            <a:endParaRPr lang="en-IN" sz="1000" dirty="0">
-              <a:solidFill>
-                <a:schemeClr val="tx1">
-                  <a:lumMod val="50000"/>
-                  <a:lumOff val="50000"/>
-                </a:schemeClr>
-              </a:solidFill>
-            </a:endParaRPr>
-          </a:p>
-        </p:txBody>
-      </p:sp>
-      <p:sp>
-        <p:nvSpPr>
           <p:cNvPr id="22" name="Rectangle 21">
             <a:extLst>
               <a:ext uri="{FF2B5EF4-FFF2-40B4-BE49-F238E27FC236}">
@@ -7671,49 +7619,6 @@
           <a:p>
             <a:pPr algn="ctr"/>
             <a:endParaRPr/>
-          </a:p>
-        </p:txBody>
-      </p:sp>
-      <p:sp>
-        <p:nvSpPr>
-          <p:cNvPr id="25" name="TextBox 24">
-            <a:extLst>
-              <a:ext uri="{FF2B5EF4-FFF2-40B4-BE49-F238E27FC236}">
-                <a16:creationId xmlns:a16="http://schemas.microsoft.com/office/drawing/2014/main" id="{F4A71529-B5C0-6997-0EA9-13970198FDE1}"/>
-              </a:ext>
-            </a:extLst>
-          </p:cNvPr>
-          <p:cNvSpPr txBox="1"/>
-          <p:nvPr/>
-        </p:nvSpPr>
-        <p:spPr>
-          <a:xfrm>
-            <a:off x="411480" y="1633079"/>
-            <a:ext cx="2743201" cy="246221"/>
-          </a:xfrm>
-          <a:prstGeom prst="rect">
-            <a:avLst/>
-          </a:prstGeom>
-          <a:noFill/>
-        </p:spPr>
-        <p:txBody>
-          <a:bodyPr wrap="square">
-            <a:spAutoFit/>
-          </a:bodyPr>
-          <a:lstStyle/>
-          <a:p>
-            <a:r>
-              <a:rPr lang="en-IN" sz="1000" i="1" dirty="0">
-                <a:solidFill>
-                  <a:schemeClr val="tx1">
-                    <a:lumMod val="50000"/>
-                    <a:lumOff val="50000"/>
-                  </a:schemeClr>
-                </a:solidFill>
-              </a:rPr>
-              <a:t>550K+ clinical trails ·  6 node types  ·  5 edge types </a:t>
-            </a:r>
-            <a:endParaRPr lang="en-IN" sz="1000" dirty="0"/>
           </a:p>
         </p:txBody>
       </p:sp>
@@ -7730,13 +7635,13 @@
           <p:nvPr>
             <p:extLst>
               <p:ext uri="{D42A27DB-BD31-4B8C-83A1-F6EECF244321}">
-                <p14:modId xmlns:p14="http://schemas.microsoft.com/office/powerpoint/2010/main" val="2581525701"/>
+                <p14:modId xmlns:p14="http://schemas.microsoft.com/office/powerpoint/2010/main" val="2484289802"/>
               </p:ext>
             </p:extLst>
           </p:nvPr>
         </p:nvGraphicFramePr>
         <p:xfrm>
-          <a:off x="411480" y="1929444"/>
+          <a:off x="868680" y="1745751"/>
           <a:ext cx="3734720" cy="3091425"/>
         </p:xfrm>
         <a:graphic>
@@ -9517,6 +9422,21 @@
               </a:rPr>
               <a:t>03  /  SPONSOR INTELLIGENCE</a:t>
             </a:r>
+            <a:r>
+              <a:rPr lang="en-IN" sz="1100" b="1" i="0" dirty="0">
+                <a:solidFill>
+                  <a:srgbClr val="FF6B35"/>
+                </a:solidFill>
+                <a:latin typeface="Calibri"/>
+              </a:rPr>
+              <a:t> - Pfizer</a:t>
+            </a:r>
+            <a:endParaRPr sz="1100" b="1" i="0" dirty="0">
+              <a:solidFill>
+                <a:srgbClr val="FF6B35"/>
+              </a:solidFill>
+              <a:latin typeface="Calibri"/>
+            </a:endParaRPr>
           </a:p>
         </p:txBody>
       </p:sp>
@@ -9551,6 +9471,100 @@
           <a:xfrm>
             <a:off x="131609" y="466344"/>
             <a:ext cx="3934870" cy="2427669"/>
+          </a:xfrm>
+          <a:prstGeom prst="rect">
+            <a:avLst/>
+          </a:prstGeom>
+          <a:noFill/>
+          <a:extLst>
+            <a:ext uri="{909E8E84-426E-40DD-AFC4-6F175D3DCCD1}">
+              <a14:hiddenFill xmlns:a14="http://schemas.microsoft.com/office/drawing/2010/main">
+                <a:solidFill>
+                  <a:srgbClr val="FFFFFF"/>
+                </a:solidFill>
+              </a14:hiddenFill>
+            </a:ext>
+          </a:extLst>
+        </p:spPr>
+      </p:pic>
+      <p:pic>
+        <p:nvPicPr>
+          <p:cNvPr id="6148" name="Picture 4">
+            <a:extLst>
+              <a:ext uri="{FF2B5EF4-FFF2-40B4-BE49-F238E27FC236}">
+                <a16:creationId xmlns:a16="http://schemas.microsoft.com/office/drawing/2014/main" id="{5DA42501-C531-1D5A-177C-B471F01E6D50}"/>
+              </a:ext>
+            </a:extLst>
+          </p:cNvPr>
+          <p:cNvPicPr>
+            <a:picLocks noChangeAspect="1" noChangeArrowheads="1"/>
+          </p:cNvPicPr>
+          <p:nvPr/>
+        </p:nvPicPr>
+        <p:blipFill>
+          <a:blip r:embed="rId3">
+            <a:extLst>
+              <a:ext uri="{28A0092B-C50C-407E-A947-70E740481C1C}">
+                <a14:useLocalDpi xmlns:a14="http://schemas.microsoft.com/office/drawing/2010/main" val="0"/>
+              </a:ext>
+            </a:extLst>
+          </a:blip>
+          <a:srcRect/>
+          <a:stretch>
+            <a:fillRect/>
+          </a:stretch>
+        </p:blipFill>
+        <p:spPr bwMode="auto">
+          <a:xfrm>
+            <a:off x="4838350" y="466344"/>
+            <a:ext cx="4174041" cy="3078812"/>
+          </a:xfrm>
+          <a:prstGeom prst="rect">
+            <a:avLst/>
+          </a:prstGeom>
+          <a:noFill/>
+          <a:extLst>
+            <a:ext uri="{909E8E84-426E-40DD-AFC4-6F175D3DCCD1}">
+              <a14:hiddenFill xmlns:a14="http://schemas.microsoft.com/office/drawing/2010/main">
+                <a:solidFill>
+                  <a:srgbClr val="FFFFFF"/>
+                </a:solidFill>
+              </a14:hiddenFill>
+            </a:ext>
+          </a:extLst>
+        </p:spPr>
+      </p:pic>
+      <p:pic>
+        <p:nvPicPr>
+          <p:cNvPr id="6150" name="Picture 6">
+            <a:extLst>
+              <a:ext uri="{FF2B5EF4-FFF2-40B4-BE49-F238E27FC236}">
+                <a16:creationId xmlns:a16="http://schemas.microsoft.com/office/drawing/2014/main" id="{0292F725-BB71-AF21-6AB2-C72EF37DC8FD}"/>
+              </a:ext>
+            </a:extLst>
+          </p:cNvPr>
+          <p:cNvPicPr>
+            <a:picLocks noChangeAspect="1" noChangeArrowheads="1"/>
+          </p:cNvPicPr>
+          <p:nvPr/>
+        </p:nvPicPr>
+        <p:blipFill>
+          <a:blip r:embed="rId4">
+            <a:extLst>
+              <a:ext uri="{28A0092B-C50C-407E-A947-70E740481C1C}">
+                <a14:useLocalDpi xmlns:a14="http://schemas.microsoft.com/office/drawing/2010/main" val="0"/>
+              </a:ext>
+            </a:extLst>
+          </a:blip>
+          <a:srcRect/>
+          <a:stretch>
+            <a:fillRect/>
+          </a:stretch>
+        </p:blipFill>
+        <p:spPr bwMode="auto">
+          <a:xfrm>
+            <a:off x="320039" y="2687405"/>
+            <a:ext cx="4868389" cy="2401231"/>
           </a:xfrm>
           <a:prstGeom prst="rect">
             <a:avLst/>
@@ -9585,6 +9599,755 @@
   <p:cSld>
     <p:spTree>
       <p:nvGrpSpPr>
+        <p:cNvPr id="1" name="">
+          <a:extLst>
+            <a:ext uri="{FF2B5EF4-FFF2-40B4-BE49-F238E27FC236}">
+              <a16:creationId xmlns:a16="http://schemas.microsoft.com/office/drawing/2014/main" id="{6C84045C-0E4B-C1E9-7C01-AF34F9A66B95}"/>
+            </a:ext>
+          </a:extLst>
+        </p:cNvPr>
+        <p:cNvGrpSpPr/>
+        <p:nvPr/>
+      </p:nvGrpSpPr>
+      <p:grpSpPr>
+        <a:xfrm>
+          <a:off x="0" y="0"/>
+          <a:ext cx="0" cy="0"/>
+          <a:chOff x="0" y="0"/>
+          <a:chExt cx="0" cy="0"/>
+        </a:xfrm>
+      </p:grpSpPr>
+      <p:pic>
+        <p:nvPicPr>
+          <p:cNvPr id="7172" name="Picture 4">
+            <a:extLst>
+              <a:ext uri="{FF2B5EF4-FFF2-40B4-BE49-F238E27FC236}">
+                <a16:creationId xmlns:a16="http://schemas.microsoft.com/office/drawing/2014/main" id="{58F5FBB7-8A6E-9192-1E46-39663779831A}"/>
+              </a:ext>
+            </a:extLst>
+          </p:cNvPr>
+          <p:cNvPicPr>
+            <a:picLocks noChangeAspect="1" noChangeArrowheads="1"/>
+          </p:cNvPicPr>
+          <p:nvPr/>
+        </p:nvPicPr>
+        <p:blipFill>
+          <a:blip r:embed="rId2">
+            <a:extLst>
+              <a:ext uri="{28A0092B-C50C-407E-A947-70E740481C1C}">
+                <a14:useLocalDpi xmlns:a14="http://schemas.microsoft.com/office/drawing/2010/main" val="0"/>
+              </a:ext>
+            </a:extLst>
+          </a:blip>
+          <a:srcRect/>
+          <a:stretch>
+            <a:fillRect/>
+          </a:stretch>
+        </p:blipFill>
+        <p:spPr bwMode="auto">
+          <a:xfrm>
+            <a:off x="4097171" y="592724"/>
+            <a:ext cx="4869649" cy="3354808"/>
+          </a:xfrm>
+          <a:prstGeom prst="rect">
+            <a:avLst/>
+          </a:prstGeom>
+          <a:noFill/>
+          <a:extLst>
+            <a:ext uri="{909E8E84-426E-40DD-AFC4-6F175D3DCCD1}">
+              <a14:hiddenFill xmlns:a14="http://schemas.microsoft.com/office/drawing/2010/main">
+                <a:solidFill>
+                  <a:srgbClr val="FFFFFF"/>
+                </a:solidFill>
+              </a14:hiddenFill>
+            </a:ext>
+          </a:extLst>
+        </p:spPr>
+      </p:pic>
+      <p:sp>
+        <p:nvSpPr>
+          <p:cNvPr id="2" name="Rectangle 1">
+            <a:extLst>
+              <a:ext uri="{FF2B5EF4-FFF2-40B4-BE49-F238E27FC236}">
+                <a16:creationId xmlns:a16="http://schemas.microsoft.com/office/drawing/2014/main" id="{7A81BA59-ABA5-0579-2D59-44096412EAD1}"/>
+              </a:ext>
+            </a:extLst>
+          </p:cNvPr>
+          <p:cNvSpPr/>
+          <p:nvPr/>
+        </p:nvSpPr>
+        <p:spPr>
+          <a:xfrm>
+            <a:off x="0" y="0"/>
+            <a:ext cx="9144000" cy="411480"/>
+          </a:xfrm>
+          <a:prstGeom prst="rect">
+            <a:avLst/>
+          </a:prstGeom>
+          <a:solidFill>
+            <a:srgbClr val="0D1B3E"/>
+          </a:solidFill>
+          <a:ln>
+            <a:noFill/>
+          </a:ln>
+        </p:spPr>
+        <p:style>
+          <a:lnRef idx="1">
+            <a:schemeClr val="accent1"/>
+          </a:lnRef>
+          <a:fillRef idx="3">
+            <a:schemeClr val="accent1"/>
+          </a:fillRef>
+          <a:effectRef idx="2">
+            <a:schemeClr val="accent1"/>
+          </a:effectRef>
+          <a:fontRef idx="minor">
+            <a:schemeClr val="lt1"/>
+          </a:fontRef>
+        </p:style>
+        <p:txBody>
+          <a:bodyPr rtlCol="0" anchor="ctr"/>
+          <a:lstStyle/>
+          <a:p>
+            <a:pPr algn="ctr"/>
+            <a:endParaRPr/>
+          </a:p>
+        </p:txBody>
+      </p:sp>
+      <p:sp>
+        <p:nvSpPr>
+          <p:cNvPr id="3" name="TextBox 2">
+            <a:extLst>
+              <a:ext uri="{FF2B5EF4-FFF2-40B4-BE49-F238E27FC236}">
+                <a16:creationId xmlns:a16="http://schemas.microsoft.com/office/drawing/2014/main" id="{FA6F9E60-208A-0A82-6BC5-6B54DB6E1A1A}"/>
+              </a:ext>
+            </a:extLst>
+          </p:cNvPr>
+          <p:cNvSpPr txBox="1"/>
+          <p:nvPr/>
+        </p:nvSpPr>
+        <p:spPr>
+          <a:xfrm>
+            <a:off x="320040" y="54864"/>
+            <a:ext cx="8503920" cy="261610"/>
+          </a:xfrm>
+          <a:prstGeom prst="rect">
+            <a:avLst/>
+          </a:prstGeom>
+          <a:noFill/>
+        </p:spPr>
+        <p:txBody>
+          <a:bodyPr wrap="square">
+            <a:spAutoFit/>
+          </a:bodyPr>
+          <a:lstStyle/>
+          <a:p>
+            <a:r>
+              <a:rPr sz="1100" b="1" i="0" dirty="0">
+                <a:solidFill>
+                  <a:srgbClr val="FF6B35"/>
+                </a:solidFill>
+                <a:latin typeface="Calibri"/>
+              </a:rPr>
+              <a:t>03  /  SPONSOR INTELLIGENCE</a:t>
+            </a:r>
+            <a:r>
+              <a:rPr lang="en-IN" sz="1100" b="1" dirty="0">
+                <a:solidFill>
+                  <a:srgbClr val="FF6B35"/>
+                </a:solidFill>
+              </a:rPr>
+              <a:t> - Pfizer</a:t>
+            </a:r>
+            <a:endParaRPr sz="1100" b="1" i="0" dirty="0">
+              <a:solidFill>
+                <a:srgbClr val="FF6B35"/>
+              </a:solidFill>
+              <a:latin typeface="Calibri"/>
+            </a:endParaRPr>
+          </a:p>
+        </p:txBody>
+      </p:sp>
+      <p:pic>
+        <p:nvPicPr>
+          <p:cNvPr id="7170" name="Picture 2">
+            <a:extLst>
+              <a:ext uri="{FF2B5EF4-FFF2-40B4-BE49-F238E27FC236}">
+                <a16:creationId xmlns:a16="http://schemas.microsoft.com/office/drawing/2014/main" id="{6077D3DA-375D-B083-7156-E404B350F8DD}"/>
+              </a:ext>
+            </a:extLst>
+          </p:cNvPr>
+          <p:cNvPicPr>
+            <a:picLocks noChangeAspect="1" noChangeArrowheads="1"/>
+          </p:cNvPicPr>
+          <p:nvPr/>
+        </p:nvPicPr>
+        <p:blipFill>
+          <a:blip r:embed="rId3">
+            <a:extLst>
+              <a:ext uri="{28A0092B-C50C-407E-A947-70E740481C1C}">
+                <a14:useLocalDpi xmlns:a14="http://schemas.microsoft.com/office/drawing/2010/main" val="0"/>
+              </a:ext>
+            </a:extLst>
+          </a:blip>
+          <a:srcRect/>
+          <a:stretch>
+            <a:fillRect/>
+          </a:stretch>
+        </p:blipFill>
+        <p:spPr bwMode="auto">
+          <a:xfrm>
+            <a:off x="118947" y="466344"/>
+            <a:ext cx="4453053" cy="2346709"/>
+          </a:xfrm>
+          <a:prstGeom prst="rect">
+            <a:avLst/>
+          </a:prstGeom>
+          <a:noFill/>
+          <a:extLst>
+            <a:ext uri="{909E8E84-426E-40DD-AFC4-6F175D3DCCD1}">
+              <a14:hiddenFill xmlns:a14="http://schemas.microsoft.com/office/drawing/2010/main">
+                <a:solidFill>
+                  <a:srgbClr val="FFFFFF"/>
+                </a:solidFill>
+              </a14:hiddenFill>
+            </a:ext>
+          </a:extLst>
+        </p:spPr>
+      </p:pic>
+    </p:spTree>
+    <p:extLst>
+      <p:ext uri="{BB962C8B-B14F-4D97-AF65-F5344CB8AC3E}">
+        <p14:creationId xmlns:p14="http://schemas.microsoft.com/office/powerpoint/2010/main" val="3471401920"/>
+      </p:ext>
+    </p:extLst>
+  </p:cSld>
+  <p:clrMapOvr>
+    <a:masterClrMapping/>
+  </p:clrMapOvr>
+</p:sld>
+</file>
+
+<file path=ppt/slides/slide14.xml><?xml version="1.0" encoding="utf-8"?>
+<p:sld xmlns:a="http://schemas.openxmlformats.org/drawingml/2006/main" xmlns:r="http://schemas.openxmlformats.org/officeDocument/2006/relationships" xmlns:p="http://schemas.openxmlformats.org/presentationml/2006/main">
+  <p:cSld>
+    <p:spTree>
+      <p:nvGrpSpPr>
+        <p:cNvPr id="1" name="">
+          <a:extLst>
+            <a:ext uri="{FF2B5EF4-FFF2-40B4-BE49-F238E27FC236}">
+              <a16:creationId xmlns:a16="http://schemas.microsoft.com/office/drawing/2014/main" id="{1A5148A8-36A9-F5AF-7CB1-7C2E93C3F650}"/>
+            </a:ext>
+          </a:extLst>
+        </p:cNvPr>
+        <p:cNvGrpSpPr/>
+        <p:nvPr/>
+      </p:nvGrpSpPr>
+      <p:grpSpPr>
+        <a:xfrm>
+          <a:off x="0" y="0"/>
+          <a:ext cx="0" cy="0"/>
+          <a:chOff x="0" y="0"/>
+          <a:chExt cx="0" cy="0"/>
+        </a:xfrm>
+      </p:grpSpPr>
+      <p:sp>
+        <p:nvSpPr>
+          <p:cNvPr id="2" name="Rectangle 1">
+            <a:extLst>
+              <a:ext uri="{FF2B5EF4-FFF2-40B4-BE49-F238E27FC236}">
+                <a16:creationId xmlns:a16="http://schemas.microsoft.com/office/drawing/2014/main" id="{8B434220-9471-DB4D-ADE9-012EB8AEDC35}"/>
+              </a:ext>
+            </a:extLst>
+          </p:cNvPr>
+          <p:cNvSpPr/>
+          <p:nvPr/>
+        </p:nvSpPr>
+        <p:spPr>
+          <a:xfrm>
+            <a:off x="0" y="0"/>
+            <a:ext cx="9144000" cy="411480"/>
+          </a:xfrm>
+          <a:prstGeom prst="rect">
+            <a:avLst/>
+          </a:prstGeom>
+          <a:solidFill>
+            <a:srgbClr val="0D1B3E"/>
+          </a:solidFill>
+          <a:ln>
+            <a:noFill/>
+          </a:ln>
+        </p:spPr>
+        <p:style>
+          <a:lnRef idx="1">
+            <a:schemeClr val="accent1"/>
+          </a:lnRef>
+          <a:fillRef idx="3">
+            <a:schemeClr val="accent1"/>
+          </a:fillRef>
+          <a:effectRef idx="2">
+            <a:schemeClr val="accent1"/>
+          </a:effectRef>
+          <a:fontRef idx="minor">
+            <a:schemeClr val="lt1"/>
+          </a:fontRef>
+        </p:style>
+        <p:txBody>
+          <a:bodyPr rtlCol="0" anchor="ctr"/>
+          <a:lstStyle/>
+          <a:p>
+            <a:pPr algn="ctr"/>
+            <a:endParaRPr/>
+          </a:p>
+        </p:txBody>
+      </p:sp>
+      <p:sp>
+        <p:nvSpPr>
+          <p:cNvPr id="3" name="TextBox 2">
+            <a:extLst>
+              <a:ext uri="{FF2B5EF4-FFF2-40B4-BE49-F238E27FC236}">
+                <a16:creationId xmlns:a16="http://schemas.microsoft.com/office/drawing/2014/main" id="{00CEBCC0-F746-94F4-1681-866A01CE6E92}"/>
+              </a:ext>
+            </a:extLst>
+          </p:cNvPr>
+          <p:cNvSpPr txBox="1"/>
+          <p:nvPr/>
+        </p:nvSpPr>
+        <p:spPr>
+          <a:xfrm>
+            <a:off x="320040" y="54864"/>
+            <a:ext cx="8503920" cy="261610"/>
+          </a:xfrm>
+          <a:prstGeom prst="rect">
+            <a:avLst/>
+          </a:prstGeom>
+          <a:noFill/>
+        </p:spPr>
+        <p:txBody>
+          <a:bodyPr wrap="square">
+            <a:spAutoFit/>
+          </a:bodyPr>
+          <a:lstStyle/>
+          <a:p>
+            <a:r>
+              <a:rPr sz="1100" b="1" i="0" dirty="0">
+                <a:solidFill>
+                  <a:srgbClr val="FF6B35"/>
+                </a:solidFill>
+                <a:latin typeface="Calibri"/>
+              </a:rPr>
+              <a:t>03  /  SPONSOR INTELLIGENCE</a:t>
+            </a:r>
+            <a:r>
+              <a:rPr lang="en-IN" sz="1100" b="1" dirty="0">
+                <a:solidFill>
+                  <a:srgbClr val="FF6B35"/>
+                </a:solidFill>
+              </a:rPr>
+              <a:t> - Novo Nordisk</a:t>
+            </a:r>
+            <a:endParaRPr sz="1100" b="1" i="0" dirty="0">
+              <a:solidFill>
+                <a:srgbClr val="FF6B35"/>
+              </a:solidFill>
+              <a:latin typeface="Calibri"/>
+            </a:endParaRPr>
+          </a:p>
+        </p:txBody>
+      </p:sp>
+      <p:pic>
+        <p:nvPicPr>
+          <p:cNvPr id="9220" name="Picture 4">
+            <a:extLst>
+              <a:ext uri="{FF2B5EF4-FFF2-40B4-BE49-F238E27FC236}">
+                <a16:creationId xmlns:a16="http://schemas.microsoft.com/office/drawing/2014/main" id="{8B9E8B99-F9B1-1EBE-D3FF-BED8A3557EBE}"/>
+              </a:ext>
+            </a:extLst>
+          </p:cNvPr>
+          <p:cNvPicPr>
+            <a:picLocks noChangeAspect="1" noChangeArrowheads="1"/>
+          </p:cNvPicPr>
+          <p:nvPr/>
+        </p:nvPicPr>
+        <p:blipFill>
+          <a:blip r:embed="rId2">
+            <a:extLst>
+              <a:ext uri="{28A0092B-C50C-407E-A947-70E740481C1C}">
+                <a14:useLocalDpi xmlns:a14="http://schemas.microsoft.com/office/drawing/2010/main" val="0"/>
+              </a:ext>
+            </a:extLst>
+          </a:blip>
+          <a:srcRect/>
+          <a:stretch>
+            <a:fillRect/>
+          </a:stretch>
+        </p:blipFill>
+        <p:spPr bwMode="auto">
+          <a:xfrm>
+            <a:off x="93039" y="550126"/>
+            <a:ext cx="3980874" cy="2800931"/>
+          </a:xfrm>
+          <a:prstGeom prst="rect">
+            <a:avLst/>
+          </a:prstGeom>
+          <a:noFill/>
+          <a:extLst>
+            <a:ext uri="{909E8E84-426E-40DD-AFC4-6F175D3DCCD1}">
+              <a14:hiddenFill xmlns:a14="http://schemas.microsoft.com/office/drawing/2010/main">
+                <a:solidFill>
+                  <a:srgbClr val="FFFFFF"/>
+                </a:solidFill>
+              </a14:hiddenFill>
+            </a:ext>
+          </a:extLst>
+        </p:spPr>
+      </p:pic>
+      <p:pic>
+        <p:nvPicPr>
+          <p:cNvPr id="9222" name="Picture 6">
+            <a:extLst>
+              <a:ext uri="{FF2B5EF4-FFF2-40B4-BE49-F238E27FC236}">
+                <a16:creationId xmlns:a16="http://schemas.microsoft.com/office/drawing/2014/main" id="{4C1169D9-B93C-7BD4-50EB-5772607B01AA}"/>
+              </a:ext>
+            </a:extLst>
+          </p:cNvPr>
+          <p:cNvPicPr>
+            <a:picLocks noChangeAspect="1" noChangeArrowheads="1"/>
+          </p:cNvPicPr>
+          <p:nvPr/>
+        </p:nvPicPr>
+        <p:blipFill>
+          <a:blip r:embed="rId3">
+            <a:extLst>
+              <a:ext uri="{28A0092B-C50C-407E-A947-70E740481C1C}">
+                <a14:useLocalDpi xmlns:a14="http://schemas.microsoft.com/office/drawing/2010/main" val="0"/>
+              </a:ext>
+            </a:extLst>
+          </a:blip>
+          <a:srcRect/>
+          <a:stretch>
+            <a:fillRect/>
+          </a:stretch>
+        </p:blipFill>
+        <p:spPr bwMode="auto">
+          <a:xfrm>
+            <a:off x="5167001" y="550126"/>
+            <a:ext cx="3889532" cy="2667891"/>
+          </a:xfrm>
+          <a:prstGeom prst="rect">
+            <a:avLst/>
+          </a:prstGeom>
+          <a:noFill/>
+          <a:extLst>
+            <a:ext uri="{909E8E84-426E-40DD-AFC4-6F175D3DCCD1}">
+              <a14:hiddenFill xmlns:a14="http://schemas.microsoft.com/office/drawing/2010/main">
+                <a:solidFill>
+                  <a:srgbClr val="FFFFFF"/>
+                </a:solidFill>
+              </a14:hiddenFill>
+            </a:ext>
+          </a:extLst>
+        </p:spPr>
+      </p:pic>
+      <p:pic>
+        <p:nvPicPr>
+          <p:cNvPr id="9218" name="Picture 2">
+            <a:extLst>
+              <a:ext uri="{FF2B5EF4-FFF2-40B4-BE49-F238E27FC236}">
+                <a16:creationId xmlns:a16="http://schemas.microsoft.com/office/drawing/2014/main" id="{602E8D31-1408-6A8B-C31D-B9CA1B884A36}"/>
+              </a:ext>
+            </a:extLst>
+          </p:cNvPr>
+          <p:cNvPicPr>
+            <a:picLocks noChangeAspect="1" noChangeArrowheads="1"/>
+          </p:cNvPicPr>
+          <p:nvPr/>
+        </p:nvPicPr>
+        <p:blipFill>
+          <a:blip r:embed="rId4">
+            <a:extLst>
+              <a:ext uri="{28A0092B-C50C-407E-A947-70E740481C1C}">
+                <a14:useLocalDpi xmlns:a14="http://schemas.microsoft.com/office/drawing/2010/main" val="0"/>
+              </a:ext>
+            </a:extLst>
+          </a:blip>
+          <a:srcRect/>
+          <a:stretch>
+            <a:fillRect/>
+          </a:stretch>
+        </p:blipFill>
+        <p:spPr bwMode="auto">
+          <a:xfrm>
+            <a:off x="2726590" y="3171556"/>
+            <a:ext cx="3889532" cy="1917080"/>
+          </a:xfrm>
+          <a:prstGeom prst="rect">
+            <a:avLst/>
+          </a:prstGeom>
+          <a:noFill/>
+          <a:extLst>
+            <a:ext uri="{909E8E84-426E-40DD-AFC4-6F175D3DCCD1}">
+              <a14:hiddenFill xmlns:a14="http://schemas.microsoft.com/office/drawing/2010/main">
+                <a:solidFill>
+                  <a:srgbClr val="FFFFFF"/>
+                </a:solidFill>
+              </a14:hiddenFill>
+            </a:ext>
+          </a:extLst>
+        </p:spPr>
+      </p:pic>
+    </p:spTree>
+    <p:extLst>
+      <p:ext uri="{BB962C8B-B14F-4D97-AF65-F5344CB8AC3E}">
+        <p14:creationId xmlns:p14="http://schemas.microsoft.com/office/powerpoint/2010/main" val="3707878894"/>
+      </p:ext>
+    </p:extLst>
+  </p:cSld>
+  <p:clrMapOvr>
+    <a:masterClrMapping/>
+  </p:clrMapOvr>
+</p:sld>
+</file>
+
+<file path=ppt/slides/slide15.xml><?xml version="1.0" encoding="utf-8"?>
+<p:sld xmlns:a="http://schemas.openxmlformats.org/drawingml/2006/main" xmlns:r="http://schemas.openxmlformats.org/officeDocument/2006/relationships" xmlns:p="http://schemas.openxmlformats.org/presentationml/2006/main">
+  <p:cSld>
+    <p:spTree>
+      <p:nvGrpSpPr>
+        <p:cNvPr id="1" name="">
+          <a:extLst>
+            <a:ext uri="{FF2B5EF4-FFF2-40B4-BE49-F238E27FC236}">
+              <a16:creationId xmlns:a16="http://schemas.microsoft.com/office/drawing/2014/main" id="{FA5016E8-B7FB-ACD1-FC0B-B41917EE3C6F}"/>
+            </a:ext>
+          </a:extLst>
+        </p:cNvPr>
+        <p:cNvGrpSpPr/>
+        <p:nvPr/>
+      </p:nvGrpSpPr>
+      <p:grpSpPr>
+        <a:xfrm>
+          <a:off x="0" y="0"/>
+          <a:ext cx="0" cy="0"/>
+          <a:chOff x="0" y="0"/>
+          <a:chExt cx="0" cy="0"/>
+        </a:xfrm>
+      </p:grpSpPr>
+      <p:sp>
+        <p:nvSpPr>
+          <p:cNvPr id="2" name="Rectangle 1">
+            <a:extLst>
+              <a:ext uri="{FF2B5EF4-FFF2-40B4-BE49-F238E27FC236}">
+                <a16:creationId xmlns:a16="http://schemas.microsoft.com/office/drawing/2014/main" id="{5178E31A-261E-3353-998F-5DA426B8827D}"/>
+              </a:ext>
+            </a:extLst>
+          </p:cNvPr>
+          <p:cNvSpPr/>
+          <p:nvPr/>
+        </p:nvSpPr>
+        <p:spPr>
+          <a:xfrm>
+            <a:off x="0" y="0"/>
+            <a:ext cx="9144000" cy="411480"/>
+          </a:xfrm>
+          <a:prstGeom prst="rect">
+            <a:avLst/>
+          </a:prstGeom>
+          <a:solidFill>
+            <a:srgbClr val="0D1B3E"/>
+          </a:solidFill>
+          <a:ln>
+            <a:noFill/>
+          </a:ln>
+        </p:spPr>
+        <p:style>
+          <a:lnRef idx="1">
+            <a:schemeClr val="accent1"/>
+          </a:lnRef>
+          <a:fillRef idx="3">
+            <a:schemeClr val="accent1"/>
+          </a:fillRef>
+          <a:effectRef idx="2">
+            <a:schemeClr val="accent1"/>
+          </a:effectRef>
+          <a:fontRef idx="minor">
+            <a:schemeClr val="lt1"/>
+          </a:fontRef>
+        </p:style>
+        <p:txBody>
+          <a:bodyPr rtlCol="0" anchor="ctr"/>
+          <a:lstStyle/>
+          <a:p>
+            <a:pPr algn="ctr"/>
+            <a:endParaRPr/>
+          </a:p>
+        </p:txBody>
+      </p:sp>
+      <p:sp>
+        <p:nvSpPr>
+          <p:cNvPr id="3" name="TextBox 2">
+            <a:extLst>
+              <a:ext uri="{FF2B5EF4-FFF2-40B4-BE49-F238E27FC236}">
+                <a16:creationId xmlns:a16="http://schemas.microsoft.com/office/drawing/2014/main" id="{50A369E3-FD6A-6047-D97C-6B937DF0EBA5}"/>
+              </a:ext>
+            </a:extLst>
+          </p:cNvPr>
+          <p:cNvSpPr txBox="1"/>
+          <p:nvPr/>
+        </p:nvSpPr>
+        <p:spPr>
+          <a:xfrm>
+            <a:off x="320040" y="54864"/>
+            <a:ext cx="8503920" cy="261610"/>
+          </a:xfrm>
+          <a:prstGeom prst="rect">
+            <a:avLst/>
+          </a:prstGeom>
+          <a:noFill/>
+        </p:spPr>
+        <p:txBody>
+          <a:bodyPr wrap="square">
+            <a:spAutoFit/>
+          </a:bodyPr>
+          <a:lstStyle/>
+          <a:p>
+            <a:r>
+              <a:rPr sz="1100" b="1" i="0" dirty="0">
+                <a:solidFill>
+                  <a:srgbClr val="FF6B35"/>
+                </a:solidFill>
+                <a:latin typeface="Calibri"/>
+              </a:rPr>
+              <a:t>03  /  SPONSOR INTELLIGENCE</a:t>
+            </a:r>
+            <a:r>
+              <a:rPr lang="en-IN" sz="1100" b="1" dirty="0">
+                <a:solidFill>
+                  <a:srgbClr val="FF6B35"/>
+                </a:solidFill>
+              </a:rPr>
+              <a:t> - Novo Nordisk</a:t>
+            </a:r>
+            <a:endParaRPr sz="1100" b="1" i="0" dirty="0">
+              <a:solidFill>
+                <a:srgbClr val="FF6B35"/>
+              </a:solidFill>
+              <a:latin typeface="Calibri"/>
+            </a:endParaRPr>
+          </a:p>
+        </p:txBody>
+      </p:sp>
+      <p:pic>
+        <p:nvPicPr>
+          <p:cNvPr id="8194" name="Picture 2">
+            <a:extLst>
+              <a:ext uri="{FF2B5EF4-FFF2-40B4-BE49-F238E27FC236}">
+                <a16:creationId xmlns:a16="http://schemas.microsoft.com/office/drawing/2014/main" id="{F3C96E2E-DE3A-7058-F707-74B8789F2E79}"/>
+              </a:ext>
+            </a:extLst>
+          </p:cNvPr>
+          <p:cNvPicPr>
+            <a:picLocks noChangeAspect="1" noChangeArrowheads="1"/>
+          </p:cNvPicPr>
+          <p:nvPr/>
+        </p:nvPicPr>
+        <p:blipFill>
+          <a:blip r:embed="rId2">
+            <a:extLst>
+              <a:ext uri="{28A0092B-C50C-407E-A947-70E740481C1C}">
+                <a14:useLocalDpi xmlns:a14="http://schemas.microsoft.com/office/drawing/2010/main" val="0"/>
+              </a:ext>
+            </a:extLst>
+          </a:blip>
+          <a:srcRect/>
+          <a:stretch>
+            <a:fillRect/>
+          </a:stretch>
+        </p:blipFill>
+        <p:spPr bwMode="auto">
+          <a:xfrm>
+            <a:off x="4662031" y="993574"/>
+            <a:ext cx="4258829" cy="3738446"/>
+          </a:xfrm>
+          <a:prstGeom prst="rect">
+            <a:avLst/>
+          </a:prstGeom>
+          <a:noFill/>
+          <a:extLst>
+            <a:ext uri="{909E8E84-426E-40DD-AFC4-6F175D3DCCD1}">
+              <a14:hiddenFill xmlns:a14="http://schemas.microsoft.com/office/drawing/2010/main">
+                <a:solidFill>
+                  <a:srgbClr val="FFFFFF"/>
+                </a:solidFill>
+              </a14:hiddenFill>
+            </a:ext>
+          </a:extLst>
+        </p:spPr>
+      </p:pic>
+      <p:pic>
+        <p:nvPicPr>
+          <p:cNvPr id="8196" name="Picture 4">
+            <a:extLst>
+              <a:ext uri="{FF2B5EF4-FFF2-40B4-BE49-F238E27FC236}">
+                <a16:creationId xmlns:a16="http://schemas.microsoft.com/office/drawing/2014/main" id="{63776BCB-A91F-B290-1EE0-A79D95757CB9}"/>
+              </a:ext>
+            </a:extLst>
+          </p:cNvPr>
+          <p:cNvPicPr>
+            <a:picLocks noChangeAspect="1" noChangeArrowheads="1"/>
+          </p:cNvPicPr>
+          <p:nvPr/>
+        </p:nvPicPr>
+        <p:blipFill>
+          <a:blip r:embed="rId3">
+            <a:extLst>
+              <a:ext uri="{28A0092B-C50C-407E-A947-70E740481C1C}">
+                <a14:useLocalDpi xmlns:a14="http://schemas.microsoft.com/office/drawing/2010/main" val="0"/>
+              </a:ext>
+            </a:extLst>
+          </a:blip>
+          <a:srcRect/>
+          <a:stretch>
+            <a:fillRect/>
+          </a:stretch>
+        </p:blipFill>
+        <p:spPr bwMode="auto">
+          <a:xfrm>
+            <a:off x="223140" y="575055"/>
+            <a:ext cx="4285662" cy="2287742"/>
+          </a:xfrm>
+          <a:prstGeom prst="rect">
+            <a:avLst/>
+          </a:prstGeom>
+          <a:noFill/>
+          <a:extLst>
+            <a:ext uri="{909E8E84-426E-40DD-AFC4-6F175D3DCCD1}">
+              <a14:hiddenFill xmlns:a14="http://schemas.microsoft.com/office/drawing/2010/main">
+                <a:solidFill>
+                  <a:srgbClr val="FFFFFF"/>
+                </a:solidFill>
+              </a14:hiddenFill>
+            </a:ext>
+          </a:extLst>
+        </p:spPr>
+      </p:pic>
+    </p:spTree>
+    <p:extLst>
+      <p:ext uri="{BB962C8B-B14F-4D97-AF65-F5344CB8AC3E}">
+        <p14:creationId xmlns:p14="http://schemas.microsoft.com/office/powerpoint/2010/main" val="1788168408"/>
+      </p:ext>
+    </p:extLst>
+  </p:cSld>
+  <p:clrMapOvr>
+    <a:masterClrMapping/>
+  </p:clrMapOvr>
+</p:sld>
+</file>
+
+<file path=ppt/slides/slide16.xml><?xml version="1.0" encoding="utf-8"?>
+<p:sld xmlns:a="http://schemas.openxmlformats.org/drawingml/2006/main" xmlns:r="http://schemas.openxmlformats.org/officeDocument/2006/relationships" xmlns:p="http://schemas.openxmlformats.org/presentationml/2006/main">
+  <p:cSld>
+    <p:spTree>
+      <p:nvGrpSpPr>
         <p:cNvPr id="1" name=""/>
         <p:cNvGrpSpPr/>
         <p:nvPr/>
@@ -10718,7 +11481,7 @@
 </p:sld>
 </file>
 
-<file path=ppt/slides/slide14.xml><?xml version="1.0" encoding="utf-8"?>
+<file path=ppt/slides/slide17.xml><?xml version="1.0" encoding="utf-8"?>
 <p:sld xmlns:a="http://schemas.openxmlformats.org/drawingml/2006/main" xmlns:r="http://schemas.openxmlformats.org/officeDocument/2006/relationships" xmlns:p="http://schemas.openxmlformats.org/presentationml/2006/main">
   <p:cSld>
     <p:bg>
@@ -11425,7 +12188,7 @@
 </p:sld>
 </file>
 
-<file path=ppt/slides/slide15.xml><?xml version="1.0" encoding="utf-8"?>
+<file path=ppt/slides/slide18.xml><?xml version="1.0" encoding="utf-8"?>
 <p:sld xmlns:a="http://schemas.openxmlformats.org/drawingml/2006/main" xmlns:r="http://schemas.openxmlformats.org/officeDocument/2006/relationships" xmlns:p="http://schemas.openxmlformats.org/presentationml/2006/main">
   <p:cSld>
     <p:spTree>
@@ -12563,7 +13326,7 @@
 </p:sld>
 </file>
 
-<file path=ppt/slides/slide16.xml><?xml version="1.0" encoding="utf-8"?>
+<file path=ppt/slides/slide19.xml><?xml version="1.0" encoding="utf-8"?>
 <p:sld xmlns:a="http://schemas.openxmlformats.org/drawingml/2006/main" xmlns:r="http://schemas.openxmlformats.org/officeDocument/2006/relationships" xmlns:p="http://schemas.openxmlformats.org/presentationml/2006/main">
   <p:cSld>
     <p:bg>
@@ -13231,1705 +13994,6 @@
                 <a:latin typeface="Calibri"/>
               </a:rPr>
               <a:t>Drugs studied across the broadest condition range are flagged as repurposing candidates. Cyclophosphamide spans 2,340 conditions — a strong cross-indication signal.</a:t>
-            </a:r>
-          </a:p>
-        </p:txBody>
-      </p:sp>
-    </p:spTree>
-  </p:cSld>
-  <p:clrMapOvr>
-    <a:masterClrMapping/>
-  </p:clrMapOvr>
-</p:sld>
-</file>
-
-<file path=ppt/slides/slide17.xml><?xml version="1.0" encoding="utf-8"?>
-<p:sld xmlns:a="http://schemas.openxmlformats.org/drawingml/2006/main" xmlns:r="http://schemas.openxmlformats.org/officeDocument/2006/relationships" xmlns:p="http://schemas.openxmlformats.org/presentationml/2006/main">
-  <p:cSld>
-    <p:bg>
-      <p:bgPr>
-        <a:solidFill>
-          <a:srgbClr val="0D1B3E"/>
-        </a:solidFill>
-        <a:effectLst/>
-      </p:bgPr>
-    </p:bg>
-    <p:spTree>
-      <p:nvGrpSpPr>
-        <p:cNvPr id="1" name=""/>
-        <p:cNvGrpSpPr/>
-        <p:nvPr/>
-      </p:nvGrpSpPr>
-      <p:grpSpPr>
-        <a:xfrm>
-          <a:off x="0" y="0"/>
-          <a:ext cx="0" cy="0"/>
-          <a:chOff x="0" y="0"/>
-          <a:chExt cx="0" cy="0"/>
-        </a:xfrm>
-      </p:grpSpPr>
-      <p:sp>
-        <p:nvSpPr>
-          <p:cNvPr id="2" name="Rectangle 1"/>
-          <p:cNvSpPr/>
-          <p:nvPr/>
-        </p:nvSpPr>
-        <p:spPr>
-          <a:xfrm>
-            <a:off x="0" y="0"/>
-            <a:ext cx="54864" cy="5143500"/>
-          </a:xfrm>
-          <a:prstGeom prst="rect">
-            <a:avLst/>
-          </a:prstGeom>
-          <a:solidFill>
-            <a:srgbClr val="00B4D8"/>
-          </a:solidFill>
-          <a:ln>
-            <a:noFill/>
-          </a:ln>
-        </p:spPr>
-        <p:style>
-          <a:lnRef idx="1">
-            <a:schemeClr val="accent1"/>
-          </a:lnRef>
-          <a:fillRef idx="3">
-            <a:schemeClr val="accent1"/>
-          </a:fillRef>
-          <a:effectRef idx="2">
-            <a:schemeClr val="accent1"/>
-          </a:effectRef>
-          <a:fontRef idx="minor">
-            <a:schemeClr val="lt1"/>
-          </a:fontRef>
-        </p:style>
-        <p:txBody>
-          <a:bodyPr rtlCol="0" anchor="ctr"/>
-          <a:lstStyle/>
-          <a:p>
-            <a:pPr algn="ctr"/>
-            <a:endParaRPr/>
-          </a:p>
-        </p:txBody>
-      </p:sp>
-      <p:sp>
-        <p:nvSpPr>
-          <p:cNvPr id="3" name="TextBox 2"/>
-          <p:cNvSpPr txBox="1"/>
-          <p:nvPr/>
-        </p:nvSpPr>
-        <p:spPr>
-          <a:xfrm>
-            <a:off x="320040" y="274320"/>
-            <a:ext cx="6400800" cy="1005840"/>
-          </a:xfrm>
-          <a:prstGeom prst="rect">
-            <a:avLst/>
-          </a:prstGeom>
-          <a:noFill/>
-        </p:spPr>
-        <p:txBody>
-          <a:bodyPr wrap="square">
-            <a:spAutoFit/>
-          </a:bodyPr>
-          <a:lstStyle/>
-          <a:p>
-            <a:pPr algn="l"/>
-            <a:r>
-              <a:rPr sz="3400" b="1" i="0">
-                <a:solidFill>
-                  <a:srgbClr val="FFFFFF"/>
-                </a:solidFill>
-                <a:latin typeface="Georgia"/>
-              </a:rPr>
-              <a:t>Why it matters:
-The GraphRAG Pipeline</a:t>
-            </a:r>
-          </a:p>
-        </p:txBody>
-      </p:sp>
-      <p:sp>
-        <p:nvSpPr>
-          <p:cNvPr id="4" name="TextBox 3"/>
-          <p:cNvSpPr txBox="1"/>
-          <p:nvPr/>
-        </p:nvSpPr>
-        <p:spPr>
-          <a:xfrm>
-            <a:off x="320040" y="1371600"/>
-            <a:ext cx="7315200" cy="347472"/>
-          </a:xfrm>
-          <a:prstGeom prst="rect">
-            <a:avLst/>
-          </a:prstGeom>
-          <a:noFill/>
-        </p:spPr>
-        <p:txBody>
-          <a:bodyPr wrap="square">
-            <a:spAutoFit/>
-          </a:bodyPr>
-          <a:lstStyle/>
-          <a:p>
-            <a:pPr algn="l"/>
-            <a:r>
-              <a:rPr sz="1300" b="0" i="0">
-                <a:solidFill>
-                  <a:srgbClr val="00B4D8"/>
-                </a:solidFill>
-                <a:latin typeface="Calibri"/>
-              </a:rPr>
-              <a:t>These 20 validated outputs become structured context for a language model.</a:t>
-            </a:r>
-          </a:p>
-        </p:txBody>
-      </p:sp>
-      <p:sp>
-        <p:nvSpPr>
-          <p:cNvPr id="5" name="Rectangle 4"/>
-          <p:cNvSpPr/>
-          <p:nvPr/>
-        </p:nvSpPr>
-        <p:spPr>
-          <a:xfrm>
-            <a:off x="320040" y="1847088"/>
-            <a:ext cx="8503920" cy="530352"/>
-          </a:xfrm>
-          <a:prstGeom prst="rect">
-            <a:avLst/>
-          </a:prstGeom>
-          <a:solidFill>
-            <a:srgbClr val="052A52"/>
-          </a:solidFill>
-          <a:ln>
-            <a:noFill/>
-          </a:ln>
-        </p:spPr>
-        <p:style>
-          <a:lnRef idx="1">
-            <a:schemeClr val="accent1"/>
-          </a:lnRef>
-          <a:fillRef idx="3">
-            <a:schemeClr val="accent1"/>
-          </a:fillRef>
-          <a:effectRef idx="2">
-            <a:schemeClr val="accent1"/>
-          </a:effectRef>
-          <a:fontRef idx="minor">
-            <a:schemeClr val="lt1"/>
-          </a:fontRef>
-        </p:style>
-        <p:txBody>
-          <a:bodyPr rtlCol="0" anchor="ctr"/>
-          <a:lstStyle/>
-          <a:p>
-            <a:pPr algn="ctr"/>
-            <a:endParaRPr/>
-          </a:p>
-        </p:txBody>
-      </p:sp>
-      <p:sp>
-        <p:nvSpPr>
-          <p:cNvPr id="6" name="TextBox 5"/>
-          <p:cNvSpPr txBox="1"/>
-          <p:nvPr/>
-        </p:nvSpPr>
-        <p:spPr>
-          <a:xfrm>
-            <a:off x="438912" y="1965960"/>
-            <a:ext cx="1371600" cy="274320"/>
-          </a:xfrm>
-          <a:prstGeom prst="rect">
-            <a:avLst/>
-          </a:prstGeom>
-          <a:noFill/>
-        </p:spPr>
-        <p:txBody>
-          <a:bodyPr wrap="square">
-            <a:spAutoFit/>
-          </a:bodyPr>
-          <a:lstStyle/>
-          <a:p>
-            <a:pPr algn="l"/>
-            <a:r>
-              <a:rPr sz="1100" b="1" i="0">
-                <a:solidFill>
-                  <a:srgbClr val="00B4D8"/>
-                </a:solidFill>
-                <a:latin typeface="Calibri"/>
-              </a:rPr>
-              <a:t>01  Query</a:t>
-            </a:r>
-          </a:p>
-        </p:txBody>
-      </p:sp>
-      <p:sp>
-        <p:nvSpPr>
-          <p:cNvPr id="7" name="TextBox 6"/>
-          <p:cNvSpPr txBox="1"/>
-          <p:nvPr/>
-        </p:nvSpPr>
-        <p:spPr>
-          <a:xfrm>
-            <a:off x="1737360" y="1965960"/>
-            <a:ext cx="6858000" cy="274320"/>
-          </a:xfrm>
-          <a:prstGeom prst="rect">
-            <a:avLst/>
-          </a:prstGeom>
-          <a:noFill/>
-        </p:spPr>
-        <p:txBody>
-          <a:bodyPr wrap="square">
-            <a:spAutoFit/>
-          </a:bodyPr>
-          <a:lstStyle/>
-          <a:p>
-            <a:pPr algn="l"/>
-            <a:r>
-              <a:rPr sz="1100" b="0" i="0">
-                <a:solidFill>
-                  <a:srgbClr val="CCDDEE"/>
-                </a:solidFill>
-                <a:latin typeface="Calibri"/>
-              </a:rPr>
-              <a:t>User asks a natural language question about a drug, disease, or sponsor</a:t>
-            </a:r>
-          </a:p>
-        </p:txBody>
-      </p:sp>
-      <p:sp>
-        <p:nvSpPr>
-          <p:cNvPr id="8" name="Rectangle 7"/>
-          <p:cNvSpPr/>
-          <p:nvPr/>
-        </p:nvSpPr>
-        <p:spPr>
-          <a:xfrm>
-            <a:off x="320040" y="2468880"/>
-            <a:ext cx="8503920" cy="530352"/>
-          </a:xfrm>
-          <a:prstGeom prst="rect">
-            <a:avLst/>
-          </a:prstGeom>
-          <a:solidFill>
-            <a:srgbClr val="052A52"/>
-          </a:solidFill>
-          <a:ln>
-            <a:noFill/>
-          </a:ln>
-        </p:spPr>
-        <p:style>
-          <a:lnRef idx="1">
-            <a:schemeClr val="accent1"/>
-          </a:lnRef>
-          <a:fillRef idx="3">
-            <a:schemeClr val="accent1"/>
-          </a:fillRef>
-          <a:effectRef idx="2">
-            <a:schemeClr val="accent1"/>
-          </a:effectRef>
-          <a:fontRef idx="minor">
-            <a:schemeClr val="lt1"/>
-          </a:fontRef>
-        </p:style>
-        <p:txBody>
-          <a:bodyPr rtlCol="0" anchor="ctr"/>
-          <a:lstStyle/>
-          <a:p>
-            <a:pPr algn="ctr"/>
-            <a:endParaRPr/>
-          </a:p>
-        </p:txBody>
-      </p:sp>
-      <p:sp>
-        <p:nvSpPr>
-          <p:cNvPr id="9" name="TextBox 8"/>
-          <p:cNvSpPr txBox="1"/>
-          <p:nvPr/>
-        </p:nvSpPr>
-        <p:spPr>
-          <a:xfrm>
-            <a:off x="438912" y="2587752"/>
-            <a:ext cx="1371600" cy="274320"/>
-          </a:xfrm>
-          <a:prstGeom prst="rect">
-            <a:avLst/>
-          </a:prstGeom>
-          <a:noFill/>
-        </p:spPr>
-        <p:txBody>
-          <a:bodyPr wrap="square">
-            <a:spAutoFit/>
-          </a:bodyPr>
-          <a:lstStyle/>
-          <a:p>
-            <a:pPr algn="l"/>
-            <a:r>
-              <a:rPr sz="1100" b="1" i="0">
-                <a:solidFill>
-                  <a:srgbClr val="00B4D8"/>
-                </a:solidFill>
-                <a:latin typeface="Calibri"/>
-              </a:rPr>
-              <a:t>02  Retrieve</a:t>
-            </a:r>
-          </a:p>
-        </p:txBody>
-      </p:sp>
-      <p:sp>
-        <p:nvSpPr>
-          <p:cNvPr id="10" name="TextBox 9"/>
-          <p:cNvSpPr txBox="1"/>
-          <p:nvPr/>
-        </p:nvSpPr>
-        <p:spPr>
-          <a:xfrm>
-            <a:off x="1737360" y="2587752"/>
-            <a:ext cx="6858000" cy="274320"/>
-          </a:xfrm>
-          <a:prstGeom prst="rect">
-            <a:avLst/>
-          </a:prstGeom>
-          <a:noFill/>
-        </p:spPr>
-        <p:txBody>
-          <a:bodyPr wrap="square">
-            <a:spAutoFit/>
-          </a:bodyPr>
-          <a:lstStyle/>
-          <a:p>
-            <a:pPr algn="l"/>
-            <a:r>
-              <a:rPr sz="1100" b="0" i="0">
-                <a:solidFill>
-                  <a:srgbClr val="CCDDEE"/>
-                </a:solidFill>
-                <a:latin typeface="Calibri"/>
-              </a:rPr>
-              <a:t>Graph query fetches the relevant subgraph — validated, structured, real</a:t>
-            </a:r>
-          </a:p>
-        </p:txBody>
-      </p:sp>
-      <p:sp>
-        <p:nvSpPr>
-          <p:cNvPr id="11" name="Rectangle 10"/>
-          <p:cNvSpPr/>
-          <p:nvPr/>
-        </p:nvSpPr>
-        <p:spPr>
-          <a:xfrm>
-            <a:off x="320040" y="3090672"/>
-            <a:ext cx="8503920" cy="530352"/>
-          </a:xfrm>
-          <a:prstGeom prst="rect">
-            <a:avLst/>
-          </a:prstGeom>
-          <a:solidFill>
-            <a:srgbClr val="052A52"/>
-          </a:solidFill>
-          <a:ln>
-            <a:noFill/>
-          </a:ln>
-        </p:spPr>
-        <p:style>
-          <a:lnRef idx="1">
-            <a:schemeClr val="accent1"/>
-          </a:lnRef>
-          <a:fillRef idx="3">
-            <a:schemeClr val="accent1"/>
-          </a:fillRef>
-          <a:effectRef idx="2">
-            <a:schemeClr val="accent1"/>
-          </a:effectRef>
-          <a:fontRef idx="minor">
-            <a:schemeClr val="lt1"/>
-          </a:fontRef>
-        </p:style>
-        <p:txBody>
-          <a:bodyPr rtlCol="0" anchor="ctr"/>
-          <a:lstStyle/>
-          <a:p>
-            <a:pPr algn="ctr"/>
-            <a:endParaRPr/>
-          </a:p>
-        </p:txBody>
-      </p:sp>
-      <p:sp>
-        <p:nvSpPr>
-          <p:cNvPr id="12" name="TextBox 11"/>
-          <p:cNvSpPr txBox="1"/>
-          <p:nvPr/>
-        </p:nvSpPr>
-        <p:spPr>
-          <a:xfrm>
-            <a:off x="438912" y="3209544"/>
-            <a:ext cx="1371600" cy="274320"/>
-          </a:xfrm>
-          <a:prstGeom prst="rect">
-            <a:avLst/>
-          </a:prstGeom>
-          <a:noFill/>
-        </p:spPr>
-        <p:txBody>
-          <a:bodyPr wrap="square">
-            <a:spAutoFit/>
-          </a:bodyPr>
-          <a:lstStyle/>
-          <a:p>
-            <a:pPr algn="l"/>
-            <a:r>
-              <a:rPr sz="1100" b="1" i="0">
-                <a:solidFill>
-                  <a:srgbClr val="00B4D8"/>
-                </a:solidFill>
-                <a:latin typeface="Calibri"/>
-              </a:rPr>
-              <a:t>03  Augment</a:t>
-            </a:r>
-          </a:p>
-        </p:txBody>
-      </p:sp>
-      <p:sp>
-        <p:nvSpPr>
-          <p:cNvPr id="13" name="TextBox 12"/>
-          <p:cNvSpPr txBox="1"/>
-          <p:nvPr/>
-        </p:nvSpPr>
-        <p:spPr>
-          <a:xfrm>
-            <a:off x="1737360" y="3209544"/>
-            <a:ext cx="6858000" cy="274320"/>
-          </a:xfrm>
-          <a:prstGeom prst="rect">
-            <a:avLst/>
-          </a:prstGeom>
-          <a:noFill/>
-        </p:spPr>
-        <p:txBody>
-          <a:bodyPr wrap="square">
-            <a:spAutoFit/>
-          </a:bodyPr>
-          <a:lstStyle/>
-          <a:p>
-            <a:pPr algn="l"/>
-            <a:r>
-              <a:rPr sz="1100" b="0" i="0">
-                <a:solidFill>
-                  <a:srgbClr val="CCDDEE"/>
-                </a:solidFill>
-                <a:latin typeface="Calibri"/>
-              </a:rPr>
-              <a:t>LLM receives the subgraph as grounded context with no hallucination risk</a:t>
-            </a:r>
-          </a:p>
-        </p:txBody>
-      </p:sp>
-      <p:sp>
-        <p:nvSpPr>
-          <p:cNvPr id="14" name="Rectangle 13"/>
-          <p:cNvSpPr/>
-          <p:nvPr/>
-        </p:nvSpPr>
-        <p:spPr>
-          <a:xfrm>
-            <a:off x="320040" y="3712464"/>
-            <a:ext cx="8503920" cy="530352"/>
-          </a:xfrm>
-          <a:prstGeom prst="rect">
-            <a:avLst/>
-          </a:prstGeom>
-          <a:solidFill>
-            <a:srgbClr val="052A52"/>
-          </a:solidFill>
-          <a:ln>
-            <a:noFill/>
-          </a:ln>
-        </p:spPr>
-        <p:style>
-          <a:lnRef idx="1">
-            <a:schemeClr val="accent1"/>
-          </a:lnRef>
-          <a:fillRef idx="3">
-            <a:schemeClr val="accent1"/>
-          </a:fillRef>
-          <a:effectRef idx="2">
-            <a:schemeClr val="accent1"/>
-          </a:effectRef>
-          <a:fontRef idx="minor">
-            <a:schemeClr val="lt1"/>
-          </a:fontRef>
-        </p:style>
-        <p:txBody>
-          <a:bodyPr rtlCol="0" anchor="ctr"/>
-          <a:lstStyle/>
-          <a:p>
-            <a:pPr algn="ctr"/>
-            <a:endParaRPr/>
-          </a:p>
-        </p:txBody>
-      </p:sp>
-      <p:sp>
-        <p:nvSpPr>
-          <p:cNvPr id="15" name="TextBox 14"/>
-          <p:cNvSpPr txBox="1"/>
-          <p:nvPr/>
-        </p:nvSpPr>
-        <p:spPr>
-          <a:xfrm>
-            <a:off x="438912" y="3831336"/>
-            <a:ext cx="1371600" cy="274320"/>
-          </a:xfrm>
-          <a:prstGeom prst="rect">
-            <a:avLst/>
-          </a:prstGeom>
-          <a:noFill/>
-        </p:spPr>
-        <p:txBody>
-          <a:bodyPr wrap="square">
-            <a:spAutoFit/>
-          </a:bodyPr>
-          <a:lstStyle/>
-          <a:p>
-            <a:pPr algn="l"/>
-            <a:r>
-              <a:rPr sz="1100" b="1" i="0">
-                <a:solidFill>
-                  <a:srgbClr val="00B4D8"/>
-                </a:solidFill>
-                <a:latin typeface="Calibri"/>
-              </a:rPr>
-              <a:t>04  Generate</a:t>
-            </a:r>
-          </a:p>
-        </p:txBody>
-      </p:sp>
-      <p:sp>
-        <p:nvSpPr>
-          <p:cNvPr id="16" name="TextBox 15"/>
-          <p:cNvSpPr txBox="1"/>
-          <p:nvPr/>
-        </p:nvSpPr>
-        <p:spPr>
-          <a:xfrm>
-            <a:off x="1737360" y="3831336"/>
-            <a:ext cx="6858000" cy="274320"/>
-          </a:xfrm>
-          <a:prstGeom prst="rect">
-            <a:avLst/>
-          </a:prstGeom>
-          <a:noFill/>
-        </p:spPr>
-        <p:txBody>
-          <a:bodyPr wrap="square">
-            <a:spAutoFit/>
-          </a:bodyPr>
-          <a:lstStyle/>
-          <a:p>
-            <a:pPr algn="l"/>
-            <a:r>
-              <a:rPr sz="1100" b="0" i="0">
-                <a:solidFill>
-                  <a:srgbClr val="CCDDEE"/>
-                </a:solidFill>
-                <a:latin typeface="Calibri"/>
-              </a:rPr>
-              <a:t>Model summarizes evidence, compares pipelines, surfaces repurposing leads</a:t>
-            </a:r>
-          </a:p>
-        </p:txBody>
-      </p:sp>
-      <p:sp>
-        <p:nvSpPr>
-          <p:cNvPr id="17" name="Rectangle 16"/>
-          <p:cNvSpPr/>
-          <p:nvPr/>
-        </p:nvSpPr>
-        <p:spPr>
-          <a:xfrm>
-            <a:off x="320040" y="4334256"/>
-            <a:ext cx="8503920" cy="530352"/>
-          </a:xfrm>
-          <a:prstGeom prst="rect">
-            <a:avLst/>
-          </a:prstGeom>
-          <a:solidFill>
-            <a:srgbClr val="052A52"/>
-          </a:solidFill>
-          <a:ln>
-            <a:noFill/>
-          </a:ln>
-        </p:spPr>
-        <p:style>
-          <a:lnRef idx="1">
-            <a:schemeClr val="accent1"/>
-          </a:lnRef>
-          <a:fillRef idx="3">
-            <a:schemeClr val="accent1"/>
-          </a:fillRef>
-          <a:effectRef idx="2">
-            <a:schemeClr val="accent1"/>
-          </a:effectRef>
-          <a:fontRef idx="minor">
-            <a:schemeClr val="lt1"/>
-          </a:fontRef>
-        </p:style>
-        <p:txBody>
-          <a:bodyPr rtlCol="0" anchor="ctr"/>
-          <a:lstStyle/>
-          <a:p>
-            <a:pPr algn="ctr"/>
-            <a:endParaRPr/>
-          </a:p>
-        </p:txBody>
-      </p:sp>
-      <p:sp>
-        <p:nvSpPr>
-          <p:cNvPr id="18" name="TextBox 17"/>
-          <p:cNvSpPr txBox="1"/>
-          <p:nvPr/>
-        </p:nvSpPr>
-        <p:spPr>
-          <a:xfrm>
-            <a:off x="438912" y="4453128"/>
-            <a:ext cx="1371600" cy="274320"/>
-          </a:xfrm>
-          <a:prstGeom prst="rect">
-            <a:avLst/>
-          </a:prstGeom>
-          <a:noFill/>
-        </p:spPr>
-        <p:txBody>
-          <a:bodyPr wrap="square">
-            <a:spAutoFit/>
-          </a:bodyPr>
-          <a:lstStyle/>
-          <a:p>
-            <a:pPr algn="l"/>
-            <a:r>
-              <a:rPr sz="1100" b="1" i="0">
-                <a:solidFill>
-                  <a:srgbClr val="00B4D8"/>
-                </a:solidFill>
-                <a:latin typeface="Calibri"/>
-              </a:rPr>
-              <a:t>05  Hypothesize</a:t>
-            </a:r>
-          </a:p>
-        </p:txBody>
-      </p:sp>
-      <p:sp>
-        <p:nvSpPr>
-          <p:cNvPr id="19" name="TextBox 18"/>
-          <p:cNvSpPr txBox="1"/>
-          <p:nvPr/>
-        </p:nvSpPr>
-        <p:spPr>
-          <a:xfrm>
-            <a:off x="1737360" y="4453128"/>
-            <a:ext cx="6858000" cy="274320"/>
-          </a:xfrm>
-          <a:prstGeom prst="rect">
-            <a:avLst/>
-          </a:prstGeom>
-          <a:noFill/>
-        </p:spPr>
-        <p:txBody>
-          <a:bodyPr wrap="square">
-            <a:spAutoFit/>
-          </a:bodyPr>
-          <a:lstStyle/>
-          <a:p>
-            <a:pPr algn="l"/>
-            <a:r>
-              <a:rPr sz="1100" b="0" i="0">
-                <a:solidFill>
-                  <a:srgbClr val="CCDDEE"/>
-                </a:solidFill>
-                <a:latin typeface="Calibri"/>
-              </a:rPr>
-              <a:t>Cross-condition and cross-sponsor patterns suggest novel research directions</a:t>
-            </a:r>
-          </a:p>
-        </p:txBody>
-      </p:sp>
-    </p:spTree>
-  </p:cSld>
-  <p:clrMapOvr>
-    <a:masterClrMapping/>
-  </p:clrMapOvr>
-</p:sld>
-</file>
-
-<file path=ppt/slides/slide18.xml><?xml version="1.0" encoding="utf-8"?>
-<p:sld xmlns:a="http://schemas.openxmlformats.org/drawingml/2006/main" xmlns:r="http://schemas.openxmlformats.org/officeDocument/2006/relationships" xmlns:p="http://schemas.openxmlformats.org/presentationml/2006/main">
-  <p:cSld>
-    <p:bg>
-      <p:bgPr>
-        <a:solidFill>
-          <a:srgbClr val="0D1B3E"/>
-        </a:solidFill>
-        <a:effectLst/>
-      </p:bgPr>
-    </p:bg>
-    <p:spTree>
-      <p:nvGrpSpPr>
-        <p:cNvPr id="1" name=""/>
-        <p:cNvGrpSpPr/>
-        <p:nvPr/>
-      </p:nvGrpSpPr>
-      <p:grpSpPr>
-        <a:xfrm>
-          <a:off x="0" y="0"/>
-          <a:ext cx="0" cy="0"/>
-          <a:chOff x="0" y="0"/>
-          <a:chExt cx="0" cy="0"/>
-        </a:xfrm>
-      </p:grpSpPr>
-      <p:sp>
-        <p:nvSpPr>
-          <p:cNvPr id="2" name="Rectangle 1"/>
-          <p:cNvSpPr/>
-          <p:nvPr/>
-        </p:nvSpPr>
-        <p:spPr>
-          <a:xfrm>
-            <a:off x="0" y="0"/>
-            <a:ext cx="9144000" cy="73152"/>
-          </a:xfrm>
-          <a:prstGeom prst="rect">
-            <a:avLst/>
-          </a:prstGeom>
-          <a:solidFill>
-            <a:srgbClr val="00B4D8"/>
-          </a:solidFill>
-          <a:ln>
-            <a:noFill/>
-          </a:ln>
-        </p:spPr>
-        <p:style>
-          <a:lnRef idx="1">
-            <a:schemeClr val="accent1"/>
-          </a:lnRef>
-          <a:fillRef idx="3">
-            <a:schemeClr val="accent1"/>
-          </a:fillRef>
-          <a:effectRef idx="2">
-            <a:schemeClr val="accent1"/>
-          </a:effectRef>
-          <a:fontRef idx="minor">
-            <a:schemeClr val="lt1"/>
-          </a:fontRef>
-        </p:style>
-        <p:txBody>
-          <a:bodyPr rtlCol="0" anchor="ctr"/>
-          <a:lstStyle/>
-          <a:p>
-            <a:pPr algn="ctr"/>
-            <a:endParaRPr/>
-          </a:p>
-        </p:txBody>
-      </p:sp>
-      <p:sp>
-        <p:nvSpPr>
-          <p:cNvPr id="3" name="TextBox 2"/>
-          <p:cNvSpPr txBox="1"/>
-          <p:nvPr/>
-        </p:nvSpPr>
-        <p:spPr>
-          <a:xfrm>
-            <a:off x="457200" y="320040"/>
-            <a:ext cx="7315200" cy="548640"/>
-          </a:xfrm>
-          <a:prstGeom prst="rect">
-            <a:avLst/>
-          </a:prstGeom>
-          <a:noFill/>
-        </p:spPr>
-        <p:txBody>
-          <a:bodyPr wrap="square">
-            <a:spAutoFit/>
-          </a:bodyPr>
-          <a:lstStyle/>
-          <a:p>
-            <a:pPr algn="l"/>
-            <a:r>
-              <a:rPr sz="3000" b="1" i="0">
-                <a:solidFill>
-                  <a:srgbClr val="FFFFFF"/>
-                </a:solidFill>
-                <a:latin typeface="Georgia"/>
-              </a:rPr>
-              <a:t>The stack behind this</a:t>
-            </a:r>
-          </a:p>
-        </p:txBody>
-      </p:sp>
-      <p:sp>
-        <p:nvSpPr>
-          <p:cNvPr id="4" name="Rectangle 3"/>
-          <p:cNvSpPr/>
-          <p:nvPr/>
-        </p:nvSpPr>
-        <p:spPr>
-          <a:xfrm>
-            <a:off x="457200" y="1005840"/>
-            <a:ext cx="1737360" cy="548640"/>
-          </a:xfrm>
-          <a:prstGeom prst="rect">
-            <a:avLst/>
-          </a:prstGeom>
-          <a:solidFill>
-            <a:srgbClr val="052A52"/>
-          </a:solidFill>
-          <a:ln>
-            <a:noFill/>
-          </a:ln>
-        </p:spPr>
-        <p:style>
-          <a:lnRef idx="1">
-            <a:schemeClr val="accent1"/>
-          </a:lnRef>
-          <a:fillRef idx="3">
-            <a:schemeClr val="accent1"/>
-          </a:fillRef>
-          <a:effectRef idx="2">
-            <a:schemeClr val="accent1"/>
-          </a:effectRef>
-          <a:fontRef idx="minor">
-            <a:schemeClr val="lt1"/>
-          </a:fontRef>
-        </p:style>
-        <p:txBody>
-          <a:bodyPr rtlCol="0" anchor="ctr"/>
-          <a:lstStyle/>
-          <a:p>
-            <a:pPr algn="ctr"/>
-            <a:endParaRPr/>
-          </a:p>
-        </p:txBody>
-      </p:sp>
-      <p:sp>
-        <p:nvSpPr>
-          <p:cNvPr id="5" name="TextBox 4"/>
-          <p:cNvSpPr txBox="1"/>
-          <p:nvPr/>
-        </p:nvSpPr>
-        <p:spPr>
-          <a:xfrm>
-            <a:off x="502920" y="1124712"/>
-            <a:ext cx="1645920" cy="274320"/>
-          </a:xfrm>
-          <a:prstGeom prst="rect">
-            <a:avLst/>
-          </a:prstGeom>
-          <a:noFill/>
-        </p:spPr>
-        <p:txBody>
-          <a:bodyPr wrap="square">
-            <a:spAutoFit/>
-          </a:bodyPr>
-          <a:lstStyle/>
-          <a:p>
-            <a:pPr algn="ctr"/>
-            <a:r>
-              <a:rPr sz="1100" b="1" i="0">
-                <a:solidFill>
-                  <a:srgbClr val="00B4D8"/>
-                </a:solidFill>
-                <a:latin typeface="Calibri"/>
-              </a:rPr>
-              <a:t>Data source</a:t>
-            </a:r>
-          </a:p>
-        </p:txBody>
-      </p:sp>
-      <p:sp>
-        <p:nvSpPr>
-          <p:cNvPr id="6" name="Rectangle 5"/>
-          <p:cNvSpPr/>
-          <p:nvPr/>
-        </p:nvSpPr>
-        <p:spPr>
-          <a:xfrm>
-            <a:off x="2331720" y="1005840"/>
-            <a:ext cx="6400800" cy="548640"/>
-          </a:xfrm>
-          <a:prstGeom prst="rect">
-            <a:avLst/>
-          </a:prstGeom>
-          <a:solidFill>
-            <a:srgbClr val="071F3A"/>
-          </a:solidFill>
-          <a:ln>
-            <a:noFill/>
-          </a:ln>
-        </p:spPr>
-        <p:style>
-          <a:lnRef idx="1">
-            <a:schemeClr val="accent1"/>
-          </a:lnRef>
-          <a:fillRef idx="3">
-            <a:schemeClr val="accent1"/>
-          </a:fillRef>
-          <a:effectRef idx="2">
-            <a:schemeClr val="accent1"/>
-          </a:effectRef>
-          <a:fontRef idx="minor">
-            <a:schemeClr val="lt1"/>
-          </a:fontRef>
-        </p:style>
-        <p:txBody>
-          <a:bodyPr rtlCol="0" anchor="ctr"/>
-          <a:lstStyle/>
-          <a:p>
-            <a:pPr algn="ctr"/>
-            <a:endParaRPr/>
-          </a:p>
-        </p:txBody>
-      </p:sp>
-      <p:sp>
-        <p:nvSpPr>
-          <p:cNvPr id="7" name="TextBox 6"/>
-          <p:cNvSpPr txBox="1"/>
-          <p:nvPr/>
-        </p:nvSpPr>
-        <p:spPr>
-          <a:xfrm>
-            <a:off x="2468880" y="1133856"/>
-            <a:ext cx="6126480" cy="274320"/>
-          </a:xfrm>
-          <a:prstGeom prst="rect">
-            <a:avLst/>
-          </a:prstGeom>
-          <a:noFill/>
-        </p:spPr>
-        <p:txBody>
-          <a:bodyPr wrap="square">
-            <a:spAutoFit/>
-          </a:bodyPr>
-          <a:lstStyle/>
-          <a:p>
-            <a:pPr algn="l"/>
-            <a:r>
-              <a:rPr sz="1150" b="0" i="0">
-                <a:solidFill>
-                  <a:srgbClr val="FFFFFF"/>
-                </a:solidFill>
-                <a:latin typeface="Calibri"/>
-              </a:rPr>
-              <a:t>ClinicalTrials.gov — full registry, 640K+ trial records</a:t>
-            </a:r>
-          </a:p>
-        </p:txBody>
-      </p:sp>
-      <p:sp>
-        <p:nvSpPr>
-          <p:cNvPr id="8" name="Rectangle 7"/>
-          <p:cNvSpPr/>
-          <p:nvPr/>
-        </p:nvSpPr>
-        <p:spPr>
-          <a:xfrm>
-            <a:off x="457200" y="1737360"/>
-            <a:ext cx="1737360" cy="548640"/>
-          </a:xfrm>
-          <a:prstGeom prst="rect">
-            <a:avLst/>
-          </a:prstGeom>
-          <a:solidFill>
-            <a:srgbClr val="052A52"/>
-          </a:solidFill>
-          <a:ln>
-            <a:noFill/>
-          </a:ln>
-        </p:spPr>
-        <p:style>
-          <a:lnRef idx="1">
-            <a:schemeClr val="accent1"/>
-          </a:lnRef>
-          <a:fillRef idx="3">
-            <a:schemeClr val="accent1"/>
-          </a:fillRef>
-          <a:effectRef idx="2">
-            <a:schemeClr val="accent1"/>
-          </a:effectRef>
-          <a:fontRef idx="minor">
-            <a:schemeClr val="lt1"/>
-          </a:fontRef>
-        </p:style>
-        <p:txBody>
-          <a:bodyPr rtlCol="0" anchor="ctr"/>
-          <a:lstStyle/>
-          <a:p>
-            <a:pPr algn="ctr"/>
-            <a:endParaRPr/>
-          </a:p>
-        </p:txBody>
-      </p:sp>
-      <p:sp>
-        <p:nvSpPr>
-          <p:cNvPr id="9" name="TextBox 8"/>
-          <p:cNvSpPr txBox="1"/>
-          <p:nvPr/>
-        </p:nvSpPr>
-        <p:spPr>
-          <a:xfrm>
-            <a:off x="502920" y="1856232"/>
-            <a:ext cx="1645920" cy="274320"/>
-          </a:xfrm>
-          <a:prstGeom prst="rect">
-            <a:avLst/>
-          </a:prstGeom>
-          <a:noFill/>
-        </p:spPr>
-        <p:txBody>
-          <a:bodyPr wrap="square">
-            <a:spAutoFit/>
-          </a:bodyPr>
-          <a:lstStyle/>
-          <a:p>
-            <a:pPr algn="ctr"/>
-            <a:r>
-              <a:rPr sz="1100" b="1" i="0">
-                <a:solidFill>
-                  <a:srgbClr val="00B4D8"/>
-                </a:solidFill>
-                <a:latin typeface="Calibri"/>
-              </a:rPr>
-              <a:t>Graph DB</a:t>
-            </a:r>
-          </a:p>
-        </p:txBody>
-      </p:sp>
-      <p:sp>
-        <p:nvSpPr>
-          <p:cNvPr id="10" name="Rectangle 9"/>
-          <p:cNvSpPr/>
-          <p:nvPr/>
-        </p:nvSpPr>
-        <p:spPr>
-          <a:xfrm>
-            <a:off x="2331720" y="1737360"/>
-            <a:ext cx="6400800" cy="548640"/>
-          </a:xfrm>
-          <a:prstGeom prst="rect">
-            <a:avLst/>
-          </a:prstGeom>
-          <a:solidFill>
-            <a:srgbClr val="071F3A"/>
-          </a:solidFill>
-          <a:ln>
-            <a:noFill/>
-          </a:ln>
-        </p:spPr>
-        <p:style>
-          <a:lnRef idx="1">
-            <a:schemeClr val="accent1"/>
-          </a:lnRef>
-          <a:fillRef idx="3">
-            <a:schemeClr val="accent1"/>
-          </a:fillRef>
-          <a:effectRef idx="2">
-            <a:schemeClr val="accent1"/>
-          </a:effectRef>
-          <a:fontRef idx="minor">
-            <a:schemeClr val="lt1"/>
-          </a:fontRef>
-        </p:style>
-        <p:txBody>
-          <a:bodyPr rtlCol="0" anchor="ctr"/>
-          <a:lstStyle/>
-          <a:p>
-            <a:pPr algn="ctr"/>
-            <a:endParaRPr/>
-          </a:p>
-        </p:txBody>
-      </p:sp>
-      <p:sp>
-        <p:nvSpPr>
-          <p:cNvPr id="11" name="TextBox 10"/>
-          <p:cNvSpPr txBox="1"/>
-          <p:nvPr/>
-        </p:nvSpPr>
-        <p:spPr>
-          <a:xfrm>
-            <a:off x="2468880" y="1865376"/>
-            <a:ext cx="6126480" cy="274320"/>
-          </a:xfrm>
-          <a:prstGeom prst="rect">
-            <a:avLst/>
-          </a:prstGeom>
-          <a:noFill/>
-        </p:spPr>
-        <p:txBody>
-          <a:bodyPr wrap="square">
-            <a:spAutoFit/>
-          </a:bodyPr>
-          <a:lstStyle/>
-          <a:p>
-            <a:pPr algn="l"/>
-            <a:r>
-              <a:rPr sz="1150" b="0" i="0">
-                <a:solidFill>
-                  <a:srgbClr val="FFFFFF"/>
-                </a:solidFill>
-                <a:latin typeface="Calibri"/>
-              </a:rPr>
-              <a:t>Neo4j — 6 node types, 5 relationship types, Cypher queries</a:t>
-            </a:r>
-          </a:p>
-        </p:txBody>
-      </p:sp>
-      <p:sp>
-        <p:nvSpPr>
-          <p:cNvPr id="12" name="Rectangle 11"/>
-          <p:cNvSpPr/>
-          <p:nvPr/>
-        </p:nvSpPr>
-        <p:spPr>
-          <a:xfrm>
-            <a:off x="457200" y="2468880"/>
-            <a:ext cx="1737360" cy="548640"/>
-          </a:xfrm>
-          <a:prstGeom prst="rect">
-            <a:avLst/>
-          </a:prstGeom>
-          <a:solidFill>
-            <a:srgbClr val="052A52"/>
-          </a:solidFill>
-          <a:ln>
-            <a:noFill/>
-          </a:ln>
-        </p:spPr>
-        <p:style>
-          <a:lnRef idx="1">
-            <a:schemeClr val="accent1"/>
-          </a:lnRef>
-          <a:fillRef idx="3">
-            <a:schemeClr val="accent1"/>
-          </a:fillRef>
-          <a:effectRef idx="2">
-            <a:schemeClr val="accent1"/>
-          </a:effectRef>
-          <a:fontRef idx="minor">
-            <a:schemeClr val="lt1"/>
-          </a:fontRef>
-        </p:style>
-        <p:txBody>
-          <a:bodyPr rtlCol="0" anchor="ctr"/>
-          <a:lstStyle/>
-          <a:p>
-            <a:pPr algn="ctr"/>
-            <a:endParaRPr/>
-          </a:p>
-        </p:txBody>
-      </p:sp>
-      <p:sp>
-        <p:nvSpPr>
-          <p:cNvPr id="13" name="TextBox 12"/>
-          <p:cNvSpPr txBox="1"/>
-          <p:nvPr/>
-        </p:nvSpPr>
-        <p:spPr>
-          <a:xfrm>
-            <a:off x="502920" y="2587752"/>
-            <a:ext cx="1645920" cy="274320"/>
-          </a:xfrm>
-          <a:prstGeom prst="rect">
-            <a:avLst/>
-          </a:prstGeom>
-          <a:noFill/>
-        </p:spPr>
-        <p:txBody>
-          <a:bodyPr wrap="square">
-            <a:spAutoFit/>
-          </a:bodyPr>
-          <a:lstStyle/>
-          <a:p>
-            <a:pPr algn="ctr"/>
-            <a:r>
-              <a:rPr sz="1100" b="1" i="0">
-                <a:solidFill>
-                  <a:srgbClr val="00B4D8"/>
-                </a:solidFill>
-                <a:latin typeface="Calibri"/>
-              </a:rPr>
-              <a:t>Extraction</a:t>
-            </a:r>
-          </a:p>
-        </p:txBody>
-      </p:sp>
-      <p:sp>
-        <p:nvSpPr>
-          <p:cNvPr id="14" name="Rectangle 13"/>
-          <p:cNvSpPr/>
-          <p:nvPr/>
-        </p:nvSpPr>
-        <p:spPr>
-          <a:xfrm>
-            <a:off x="2331720" y="2468880"/>
-            <a:ext cx="6400800" cy="548640"/>
-          </a:xfrm>
-          <a:prstGeom prst="rect">
-            <a:avLst/>
-          </a:prstGeom>
-          <a:solidFill>
-            <a:srgbClr val="071F3A"/>
-          </a:solidFill>
-          <a:ln>
-            <a:noFill/>
-          </a:ln>
-        </p:spPr>
-        <p:style>
-          <a:lnRef idx="1">
-            <a:schemeClr val="accent1"/>
-          </a:lnRef>
-          <a:fillRef idx="3">
-            <a:schemeClr val="accent1"/>
-          </a:fillRef>
-          <a:effectRef idx="2">
-            <a:schemeClr val="accent1"/>
-          </a:effectRef>
-          <a:fontRef idx="minor">
-            <a:schemeClr val="lt1"/>
-          </a:fontRef>
-        </p:style>
-        <p:txBody>
-          <a:bodyPr rtlCol="0" anchor="ctr"/>
-          <a:lstStyle/>
-          <a:p>
-            <a:pPr algn="ctr"/>
-            <a:endParaRPr/>
-          </a:p>
-        </p:txBody>
-      </p:sp>
-      <p:sp>
-        <p:nvSpPr>
-          <p:cNvPr id="15" name="TextBox 14"/>
-          <p:cNvSpPr txBox="1"/>
-          <p:nvPr/>
-        </p:nvSpPr>
-        <p:spPr>
-          <a:xfrm>
-            <a:off x="2468880" y="2596896"/>
-            <a:ext cx="6126480" cy="274320"/>
-          </a:xfrm>
-          <a:prstGeom prst="rect">
-            <a:avLst/>
-          </a:prstGeom>
-          <a:noFill/>
-        </p:spPr>
-        <p:txBody>
-          <a:bodyPr wrap="square">
-            <a:spAutoFit/>
-          </a:bodyPr>
-          <a:lstStyle/>
-          <a:p>
-            <a:pPr algn="l"/>
-            <a:r>
-              <a:rPr sz="1150" b="0" i="0">
-                <a:solidFill>
-                  <a:srgbClr val="FFFFFF"/>
-                </a:solidFill>
-                <a:latin typeface="Calibri"/>
-              </a:rPr>
-              <a:t>Python · pandas · networkx · python-louvain</a:t>
-            </a:r>
-          </a:p>
-        </p:txBody>
-      </p:sp>
-      <p:sp>
-        <p:nvSpPr>
-          <p:cNvPr id="16" name="Rectangle 15"/>
-          <p:cNvSpPr/>
-          <p:nvPr/>
-        </p:nvSpPr>
-        <p:spPr>
-          <a:xfrm>
-            <a:off x="457200" y="3200400"/>
-            <a:ext cx="1737360" cy="548640"/>
-          </a:xfrm>
-          <a:prstGeom prst="rect">
-            <a:avLst/>
-          </a:prstGeom>
-          <a:solidFill>
-            <a:srgbClr val="052A52"/>
-          </a:solidFill>
-          <a:ln>
-            <a:noFill/>
-          </a:ln>
-        </p:spPr>
-        <p:style>
-          <a:lnRef idx="1">
-            <a:schemeClr val="accent1"/>
-          </a:lnRef>
-          <a:fillRef idx="3">
-            <a:schemeClr val="accent1"/>
-          </a:fillRef>
-          <a:effectRef idx="2">
-            <a:schemeClr val="accent1"/>
-          </a:effectRef>
-          <a:fontRef idx="minor">
-            <a:schemeClr val="lt1"/>
-          </a:fontRef>
-        </p:style>
-        <p:txBody>
-          <a:bodyPr rtlCol="0" anchor="ctr"/>
-          <a:lstStyle/>
-          <a:p>
-            <a:pPr algn="ctr"/>
-            <a:endParaRPr/>
-          </a:p>
-        </p:txBody>
-      </p:sp>
-      <p:sp>
-        <p:nvSpPr>
-          <p:cNvPr id="17" name="TextBox 16"/>
-          <p:cNvSpPr txBox="1"/>
-          <p:nvPr/>
-        </p:nvSpPr>
-        <p:spPr>
-          <a:xfrm>
-            <a:off x="502920" y="3319272"/>
-            <a:ext cx="1645920" cy="274320"/>
-          </a:xfrm>
-          <a:prstGeom prst="rect">
-            <a:avLst/>
-          </a:prstGeom>
-          <a:noFill/>
-        </p:spPr>
-        <p:txBody>
-          <a:bodyPr wrap="square">
-            <a:spAutoFit/>
-          </a:bodyPr>
-          <a:lstStyle/>
-          <a:p>
-            <a:pPr algn="ctr"/>
-            <a:r>
-              <a:rPr sz="1100" b="1" i="0">
-                <a:solidFill>
-                  <a:srgbClr val="00B4D8"/>
-                </a:solidFill>
-                <a:latin typeface="Calibri"/>
-              </a:rPr>
-              <a:t>Visualization</a:t>
-            </a:r>
-          </a:p>
-        </p:txBody>
-      </p:sp>
-      <p:sp>
-        <p:nvSpPr>
-          <p:cNvPr id="18" name="Rectangle 17"/>
-          <p:cNvSpPr/>
-          <p:nvPr/>
-        </p:nvSpPr>
-        <p:spPr>
-          <a:xfrm>
-            <a:off x="2331720" y="3200400"/>
-            <a:ext cx="6400800" cy="548640"/>
-          </a:xfrm>
-          <a:prstGeom prst="rect">
-            <a:avLst/>
-          </a:prstGeom>
-          <a:solidFill>
-            <a:srgbClr val="071F3A"/>
-          </a:solidFill>
-          <a:ln>
-            <a:noFill/>
-          </a:ln>
-        </p:spPr>
-        <p:style>
-          <a:lnRef idx="1">
-            <a:schemeClr val="accent1"/>
-          </a:lnRef>
-          <a:fillRef idx="3">
-            <a:schemeClr val="accent1"/>
-          </a:fillRef>
-          <a:effectRef idx="2">
-            <a:schemeClr val="accent1"/>
-          </a:effectRef>
-          <a:fontRef idx="minor">
-            <a:schemeClr val="lt1"/>
-          </a:fontRef>
-        </p:style>
-        <p:txBody>
-          <a:bodyPr rtlCol="0" anchor="ctr"/>
-          <a:lstStyle/>
-          <a:p>
-            <a:pPr algn="ctr"/>
-            <a:endParaRPr/>
-          </a:p>
-        </p:txBody>
-      </p:sp>
-      <p:sp>
-        <p:nvSpPr>
-          <p:cNvPr id="19" name="TextBox 18"/>
-          <p:cNvSpPr txBox="1"/>
-          <p:nvPr/>
-        </p:nvSpPr>
-        <p:spPr>
-          <a:xfrm>
-            <a:off x="2468880" y="3328416"/>
-            <a:ext cx="6126480" cy="274320"/>
-          </a:xfrm>
-          <a:prstGeom prst="rect">
-            <a:avLst/>
-          </a:prstGeom>
-          <a:noFill/>
-        </p:spPr>
-        <p:txBody>
-          <a:bodyPr wrap="square">
-            <a:spAutoFit/>
-          </a:bodyPr>
-          <a:lstStyle/>
-          <a:p>
-            <a:pPr algn="l"/>
-            <a:r>
-              <a:rPr sz="1150" b="0" i="0">
-                <a:solidFill>
-                  <a:srgbClr val="FFFFFF"/>
-                </a:solidFill>
-                <a:latin typeface="Calibri"/>
-              </a:rPr>
-              <a:t>matplotlib · seaborn · plotly-ready</a:t>
-            </a:r>
-          </a:p>
-        </p:txBody>
-      </p:sp>
-      <p:sp>
-        <p:nvSpPr>
-          <p:cNvPr id="20" name="Rectangle 19"/>
-          <p:cNvSpPr/>
-          <p:nvPr/>
-        </p:nvSpPr>
-        <p:spPr>
-          <a:xfrm>
-            <a:off x="457200" y="3931920"/>
-            <a:ext cx="1737360" cy="548640"/>
-          </a:xfrm>
-          <a:prstGeom prst="rect">
-            <a:avLst/>
-          </a:prstGeom>
-          <a:solidFill>
-            <a:srgbClr val="052A52"/>
-          </a:solidFill>
-          <a:ln>
-            <a:noFill/>
-          </a:ln>
-        </p:spPr>
-        <p:style>
-          <a:lnRef idx="1">
-            <a:schemeClr val="accent1"/>
-          </a:lnRef>
-          <a:fillRef idx="3">
-            <a:schemeClr val="accent1"/>
-          </a:fillRef>
-          <a:effectRef idx="2">
-            <a:schemeClr val="accent1"/>
-          </a:effectRef>
-          <a:fontRef idx="minor">
-            <a:schemeClr val="lt1"/>
-          </a:fontRef>
-        </p:style>
-        <p:txBody>
-          <a:bodyPr rtlCol="0" anchor="ctr"/>
-          <a:lstStyle/>
-          <a:p>
-            <a:pPr algn="ctr"/>
-            <a:endParaRPr/>
-          </a:p>
-        </p:txBody>
-      </p:sp>
-      <p:sp>
-        <p:nvSpPr>
-          <p:cNvPr id="21" name="TextBox 20"/>
-          <p:cNvSpPr txBox="1"/>
-          <p:nvPr/>
-        </p:nvSpPr>
-        <p:spPr>
-          <a:xfrm>
-            <a:off x="502920" y="4050792"/>
-            <a:ext cx="1645920" cy="274320"/>
-          </a:xfrm>
-          <a:prstGeom prst="rect">
-            <a:avLst/>
-          </a:prstGeom>
-          <a:noFill/>
-        </p:spPr>
-        <p:txBody>
-          <a:bodyPr wrap="square">
-            <a:spAutoFit/>
-          </a:bodyPr>
-          <a:lstStyle/>
-          <a:p>
-            <a:pPr algn="ctr"/>
-            <a:r>
-              <a:rPr sz="1100" b="1" i="0">
-                <a:solidFill>
-                  <a:srgbClr val="00B4D8"/>
-                </a:solidFill>
-                <a:latin typeface="Calibri"/>
-              </a:rPr>
-              <a:t>Next stage</a:t>
-            </a:r>
-          </a:p>
-        </p:txBody>
-      </p:sp>
-      <p:sp>
-        <p:nvSpPr>
-          <p:cNvPr id="22" name="Rectangle 21"/>
-          <p:cNvSpPr/>
-          <p:nvPr/>
-        </p:nvSpPr>
-        <p:spPr>
-          <a:xfrm>
-            <a:off x="2331720" y="3931920"/>
-            <a:ext cx="6400800" cy="548640"/>
-          </a:xfrm>
-          <a:prstGeom prst="rect">
-            <a:avLst/>
-          </a:prstGeom>
-          <a:solidFill>
-            <a:srgbClr val="071F3A"/>
-          </a:solidFill>
-          <a:ln>
-            <a:noFill/>
-          </a:ln>
-        </p:spPr>
-        <p:style>
-          <a:lnRef idx="1">
-            <a:schemeClr val="accent1"/>
-          </a:lnRef>
-          <a:fillRef idx="3">
-            <a:schemeClr val="accent1"/>
-          </a:fillRef>
-          <a:effectRef idx="2">
-            <a:schemeClr val="accent1"/>
-          </a:effectRef>
-          <a:fontRef idx="minor">
-            <a:schemeClr val="lt1"/>
-          </a:fontRef>
-        </p:style>
-        <p:txBody>
-          <a:bodyPr rtlCol="0" anchor="ctr"/>
-          <a:lstStyle/>
-          <a:p>
-            <a:pPr algn="ctr"/>
-            <a:endParaRPr/>
-          </a:p>
-        </p:txBody>
-      </p:sp>
-      <p:sp>
-        <p:nvSpPr>
-          <p:cNvPr id="23" name="TextBox 22"/>
-          <p:cNvSpPr txBox="1"/>
-          <p:nvPr/>
-        </p:nvSpPr>
-        <p:spPr>
-          <a:xfrm>
-            <a:off x="2468880" y="4059936"/>
-            <a:ext cx="6126480" cy="274320"/>
-          </a:xfrm>
-          <a:prstGeom prst="rect">
-            <a:avLst/>
-          </a:prstGeom>
-          <a:noFill/>
-        </p:spPr>
-        <p:txBody>
-          <a:bodyPr wrap="square">
-            <a:spAutoFit/>
-          </a:bodyPr>
-          <a:lstStyle/>
-          <a:p>
-            <a:pPr algn="l"/>
-            <a:r>
-              <a:rPr sz="1150" b="0" i="0">
-                <a:solidFill>
-                  <a:srgbClr val="FFFFFF"/>
-                </a:solidFill>
-                <a:latin typeface="Calibri"/>
-              </a:rPr>
-              <a:t>GraphRAG pipeline → LLM summarization + hypothesis generation</a:t>
-            </a:r>
-          </a:p>
-        </p:txBody>
-      </p:sp>
-      <p:sp>
-        <p:nvSpPr>
-          <p:cNvPr id="24" name="Rectangle 23"/>
-          <p:cNvSpPr/>
-          <p:nvPr/>
-        </p:nvSpPr>
-        <p:spPr>
-          <a:xfrm>
-            <a:off x="457200" y="4572000"/>
-            <a:ext cx="8229600" cy="402336"/>
-          </a:xfrm>
-          <a:prstGeom prst="rect">
-            <a:avLst/>
-          </a:prstGeom>
-          <a:solidFill>
-            <a:srgbClr val="00B4D8"/>
-          </a:solidFill>
-          <a:ln>
-            <a:noFill/>
-          </a:ln>
-        </p:spPr>
-        <p:style>
-          <a:lnRef idx="1">
-            <a:schemeClr val="accent1"/>
-          </a:lnRef>
-          <a:fillRef idx="3">
-            <a:schemeClr val="accent1"/>
-          </a:fillRef>
-          <a:effectRef idx="2">
-            <a:schemeClr val="accent1"/>
-          </a:effectRef>
-          <a:fontRef idx="minor">
-            <a:schemeClr val="lt1"/>
-          </a:fontRef>
-        </p:style>
-        <p:txBody>
-          <a:bodyPr rtlCol="0" anchor="ctr"/>
-          <a:lstStyle/>
-          <a:p>
-            <a:pPr algn="ctr"/>
-            <a:endParaRPr/>
-          </a:p>
-        </p:txBody>
-      </p:sp>
-      <p:sp>
-        <p:nvSpPr>
-          <p:cNvPr id="25" name="TextBox 24"/>
-          <p:cNvSpPr txBox="1"/>
-          <p:nvPr/>
-        </p:nvSpPr>
-        <p:spPr>
-          <a:xfrm>
-            <a:off x="548640" y="4608576"/>
-            <a:ext cx="8046720" cy="329184"/>
-          </a:xfrm>
-          <a:prstGeom prst="rect">
-            <a:avLst/>
-          </a:prstGeom>
-          <a:noFill/>
-        </p:spPr>
-        <p:txBody>
-          <a:bodyPr wrap="square">
-            <a:spAutoFit/>
-          </a:bodyPr>
-          <a:lstStyle/>
-          <a:p>
-            <a:pPr algn="ctr"/>
-            <a:r>
-              <a:rPr sz="1300" b="1" i="0">
-                <a:solidFill>
-                  <a:srgbClr val="0D1B3E"/>
-                </a:solidFill>
-                <a:latin typeface="Calibri"/>
-              </a:rPr>
-              <a:t>Interested in applying this to your therapeutic area?  Let's connect →</a:t>
             </a:r>
           </a:p>
         </p:txBody>
@@ -16114,6 +15178,1705 @@
           </p:txBody>
         </p:sp>
       </p:grpSp>
+    </p:spTree>
+  </p:cSld>
+  <p:clrMapOvr>
+    <a:masterClrMapping/>
+  </p:clrMapOvr>
+</p:sld>
+</file>
+
+<file path=ppt/slides/slide20.xml><?xml version="1.0" encoding="utf-8"?>
+<p:sld xmlns:a="http://schemas.openxmlformats.org/drawingml/2006/main" xmlns:r="http://schemas.openxmlformats.org/officeDocument/2006/relationships" xmlns:p="http://schemas.openxmlformats.org/presentationml/2006/main">
+  <p:cSld>
+    <p:bg>
+      <p:bgPr>
+        <a:solidFill>
+          <a:srgbClr val="0D1B3E"/>
+        </a:solidFill>
+        <a:effectLst/>
+      </p:bgPr>
+    </p:bg>
+    <p:spTree>
+      <p:nvGrpSpPr>
+        <p:cNvPr id="1" name=""/>
+        <p:cNvGrpSpPr/>
+        <p:nvPr/>
+      </p:nvGrpSpPr>
+      <p:grpSpPr>
+        <a:xfrm>
+          <a:off x="0" y="0"/>
+          <a:ext cx="0" cy="0"/>
+          <a:chOff x="0" y="0"/>
+          <a:chExt cx="0" cy="0"/>
+        </a:xfrm>
+      </p:grpSpPr>
+      <p:sp>
+        <p:nvSpPr>
+          <p:cNvPr id="2" name="Rectangle 1"/>
+          <p:cNvSpPr/>
+          <p:nvPr/>
+        </p:nvSpPr>
+        <p:spPr>
+          <a:xfrm>
+            <a:off x="0" y="0"/>
+            <a:ext cx="54864" cy="5143500"/>
+          </a:xfrm>
+          <a:prstGeom prst="rect">
+            <a:avLst/>
+          </a:prstGeom>
+          <a:solidFill>
+            <a:srgbClr val="00B4D8"/>
+          </a:solidFill>
+          <a:ln>
+            <a:noFill/>
+          </a:ln>
+        </p:spPr>
+        <p:style>
+          <a:lnRef idx="1">
+            <a:schemeClr val="accent1"/>
+          </a:lnRef>
+          <a:fillRef idx="3">
+            <a:schemeClr val="accent1"/>
+          </a:fillRef>
+          <a:effectRef idx="2">
+            <a:schemeClr val="accent1"/>
+          </a:effectRef>
+          <a:fontRef idx="minor">
+            <a:schemeClr val="lt1"/>
+          </a:fontRef>
+        </p:style>
+        <p:txBody>
+          <a:bodyPr rtlCol="0" anchor="ctr"/>
+          <a:lstStyle/>
+          <a:p>
+            <a:pPr algn="ctr"/>
+            <a:endParaRPr/>
+          </a:p>
+        </p:txBody>
+      </p:sp>
+      <p:sp>
+        <p:nvSpPr>
+          <p:cNvPr id="3" name="TextBox 2"/>
+          <p:cNvSpPr txBox="1"/>
+          <p:nvPr/>
+        </p:nvSpPr>
+        <p:spPr>
+          <a:xfrm>
+            <a:off x="320040" y="274320"/>
+            <a:ext cx="6400800" cy="1005840"/>
+          </a:xfrm>
+          <a:prstGeom prst="rect">
+            <a:avLst/>
+          </a:prstGeom>
+          <a:noFill/>
+        </p:spPr>
+        <p:txBody>
+          <a:bodyPr wrap="square">
+            <a:spAutoFit/>
+          </a:bodyPr>
+          <a:lstStyle/>
+          <a:p>
+            <a:pPr algn="l"/>
+            <a:r>
+              <a:rPr sz="3400" b="1" i="0">
+                <a:solidFill>
+                  <a:srgbClr val="FFFFFF"/>
+                </a:solidFill>
+                <a:latin typeface="Georgia"/>
+              </a:rPr>
+              <a:t>Why it matters:
+The GraphRAG Pipeline</a:t>
+            </a:r>
+          </a:p>
+        </p:txBody>
+      </p:sp>
+      <p:sp>
+        <p:nvSpPr>
+          <p:cNvPr id="4" name="TextBox 3"/>
+          <p:cNvSpPr txBox="1"/>
+          <p:nvPr/>
+        </p:nvSpPr>
+        <p:spPr>
+          <a:xfrm>
+            <a:off x="320040" y="1371600"/>
+            <a:ext cx="7315200" cy="347472"/>
+          </a:xfrm>
+          <a:prstGeom prst="rect">
+            <a:avLst/>
+          </a:prstGeom>
+          <a:noFill/>
+        </p:spPr>
+        <p:txBody>
+          <a:bodyPr wrap="square">
+            <a:spAutoFit/>
+          </a:bodyPr>
+          <a:lstStyle/>
+          <a:p>
+            <a:pPr algn="l"/>
+            <a:r>
+              <a:rPr sz="1300" b="0" i="0">
+                <a:solidFill>
+                  <a:srgbClr val="00B4D8"/>
+                </a:solidFill>
+                <a:latin typeface="Calibri"/>
+              </a:rPr>
+              <a:t>These 20 validated outputs become structured context for a language model.</a:t>
+            </a:r>
+          </a:p>
+        </p:txBody>
+      </p:sp>
+      <p:sp>
+        <p:nvSpPr>
+          <p:cNvPr id="5" name="Rectangle 4"/>
+          <p:cNvSpPr/>
+          <p:nvPr/>
+        </p:nvSpPr>
+        <p:spPr>
+          <a:xfrm>
+            <a:off x="320040" y="1847088"/>
+            <a:ext cx="8503920" cy="530352"/>
+          </a:xfrm>
+          <a:prstGeom prst="rect">
+            <a:avLst/>
+          </a:prstGeom>
+          <a:solidFill>
+            <a:srgbClr val="052A52"/>
+          </a:solidFill>
+          <a:ln>
+            <a:noFill/>
+          </a:ln>
+        </p:spPr>
+        <p:style>
+          <a:lnRef idx="1">
+            <a:schemeClr val="accent1"/>
+          </a:lnRef>
+          <a:fillRef idx="3">
+            <a:schemeClr val="accent1"/>
+          </a:fillRef>
+          <a:effectRef idx="2">
+            <a:schemeClr val="accent1"/>
+          </a:effectRef>
+          <a:fontRef idx="minor">
+            <a:schemeClr val="lt1"/>
+          </a:fontRef>
+        </p:style>
+        <p:txBody>
+          <a:bodyPr rtlCol="0" anchor="ctr"/>
+          <a:lstStyle/>
+          <a:p>
+            <a:pPr algn="ctr"/>
+            <a:endParaRPr/>
+          </a:p>
+        </p:txBody>
+      </p:sp>
+      <p:sp>
+        <p:nvSpPr>
+          <p:cNvPr id="6" name="TextBox 5"/>
+          <p:cNvSpPr txBox="1"/>
+          <p:nvPr/>
+        </p:nvSpPr>
+        <p:spPr>
+          <a:xfrm>
+            <a:off x="438912" y="1965960"/>
+            <a:ext cx="1371600" cy="274320"/>
+          </a:xfrm>
+          <a:prstGeom prst="rect">
+            <a:avLst/>
+          </a:prstGeom>
+          <a:noFill/>
+        </p:spPr>
+        <p:txBody>
+          <a:bodyPr wrap="square">
+            <a:spAutoFit/>
+          </a:bodyPr>
+          <a:lstStyle/>
+          <a:p>
+            <a:pPr algn="l"/>
+            <a:r>
+              <a:rPr sz="1100" b="1" i="0">
+                <a:solidFill>
+                  <a:srgbClr val="00B4D8"/>
+                </a:solidFill>
+                <a:latin typeface="Calibri"/>
+              </a:rPr>
+              <a:t>01  Query</a:t>
+            </a:r>
+          </a:p>
+        </p:txBody>
+      </p:sp>
+      <p:sp>
+        <p:nvSpPr>
+          <p:cNvPr id="7" name="TextBox 6"/>
+          <p:cNvSpPr txBox="1"/>
+          <p:nvPr/>
+        </p:nvSpPr>
+        <p:spPr>
+          <a:xfrm>
+            <a:off x="1737360" y="1965960"/>
+            <a:ext cx="6858000" cy="274320"/>
+          </a:xfrm>
+          <a:prstGeom prst="rect">
+            <a:avLst/>
+          </a:prstGeom>
+          <a:noFill/>
+        </p:spPr>
+        <p:txBody>
+          <a:bodyPr wrap="square">
+            <a:spAutoFit/>
+          </a:bodyPr>
+          <a:lstStyle/>
+          <a:p>
+            <a:pPr algn="l"/>
+            <a:r>
+              <a:rPr sz="1100" b="0" i="0">
+                <a:solidFill>
+                  <a:srgbClr val="CCDDEE"/>
+                </a:solidFill>
+                <a:latin typeface="Calibri"/>
+              </a:rPr>
+              <a:t>User asks a natural language question about a drug, disease, or sponsor</a:t>
+            </a:r>
+          </a:p>
+        </p:txBody>
+      </p:sp>
+      <p:sp>
+        <p:nvSpPr>
+          <p:cNvPr id="8" name="Rectangle 7"/>
+          <p:cNvSpPr/>
+          <p:nvPr/>
+        </p:nvSpPr>
+        <p:spPr>
+          <a:xfrm>
+            <a:off x="320040" y="2468880"/>
+            <a:ext cx="8503920" cy="530352"/>
+          </a:xfrm>
+          <a:prstGeom prst="rect">
+            <a:avLst/>
+          </a:prstGeom>
+          <a:solidFill>
+            <a:srgbClr val="052A52"/>
+          </a:solidFill>
+          <a:ln>
+            <a:noFill/>
+          </a:ln>
+        </p:spPr>
+        <p:style>
+          <a:lnRef idx="1">
+            <a:schemeClr val="accent1"/>
+          </a:lnRef>
+          <a:fillRef idx="3">
+            <a:schemeClr val="accent1"/>
+          </a:fillRef>
+          <a:effectRef idx="2">
+            <a:schemeClr val="accent1"/>
+          </a:effectRef>
+          <a:fontRef idx="minor">
+            <a:schemeClr val="lt1"/>
+          </a:fontRef>
+        </p:style>
+        <p:txBody>
+          <a:bodyPr rtlCol="0" anchor="ctr"/>
+          <a:lstStyle/>
+          <a:p>
+            <a:pPr algn="ctr"/>
+            <a:endParaRPr/>
+          </a:p>
+        </p:txBody>
+      </p:sp>
+      <p:sp>
+        <p:nvSpPr>
+          <p:cNvPr id="9" name="TextBox 8"/>
+          <p:cNvSpPr txBox="1"/>
+          <p:nvPr/>
+        </p:nvSpPr>
+        <p:spPr>
+          <a:xfrm>
+            <a:off x="438912" y="2587752"/>
+            <a:ext cx="1371600" cy="274320"/>
+          </a:xfrm>
+          <a:prstGeom prst="rect">
+            <a:avLst/>
+          </a:prstGeom>
+          <a:noFill/>
+        </p:spPr>
+        <p:txBody>
+          <a:bodyPr wrap="square">
+            <a:spAutoFit/>
+          </a:bodyPr>
+          <a:lstStyle/>
+          <a:p>
+            <a:pPr algn="l"/>
+            <a:r>
+              <a:rPr sz="1100" b="1" i="0">
+                <a:solidFill>
+                  <a:srgbClr val="00B4D8"/>
+                </a:solidFill>
+                <a:latin typeface="Calibri"/>
+              </a:rPr>
+              <a:t>02  Retrieve</a:t>
+            </a:r>
+          </a:p>
+        </p:txBody>
+      </p:sp>
+      <p:sp>
+        <p:nvSpPr>
+          <p:cNvPr id="10" name="TextBox 9"/>
+          <p:cNvSpPr txBox="1"/>
+          <p:nvPr/>
+        </p:nvSpPr>
+        <p:spPr>
+          <a:xfrm>
+            <a:off x="1737360" y="2587752"/>
+            <a:ext cx="6858000" cy="274320"/>
+          </a:xfrm>
+          <a:prstGeom prst="rect">
+            <a:avLst/>
+          </a:prstGeom>
+          <a:noFill/>
+        </p:spPr>
+        <p:txBody>
+          <a:bodyPr wrap="square">
+            <a:spAutoFit/>
+          </a:bodyPr>
+          <a:lstStyle/>
+          <a:p>
+            <a:pPr algn="l"/>
+            <a:r>
+              <a:rPr sz="1100" b="0" i="0">
+                <a:solidFill>
+                  <a:srgbClr val="CCDDEE"/>
+                </a:solidFill>
+                <a:latin typeface="Calibri"/>
+              </a:rPr>
+              <a:t>Graph query fetches the relevant subgraph — validated, structured, real</a:t>
+            </a:r>
+          </a:p>
+        </p:txBody>
+      </p:sp>
+      <p:sp>
+        <p:nvSpPr>
+          <p:cNvPr id="11" name="Rectangle 10"/>
+          <p:cNvSpPr/>
+          <p:nvPr/>
+        </p:nvSpPr>
+        <p:spPr>
+          <a:xfrm>
+            <a:off x="320040" y="3090672"/>
+            <a:ext cx="8503920" cy="530352"/>
+          </a:xfrm>
+          <a:prstGeom prst="rect">
+            <a:avLst/>
+          </a:prstGeom>
+          <a:solidFill>
+            <a:srgbClr val="052A52"/>
+          </a:solidFill>
+          <a:ln>
+            <a:noFill/>
+          </a:ln>
+        </p:spPr>
+        <p:style>
+          <a:lnRef idx="1">
+            <a:schemeClr val="accent1"/>
+          </a:lnRef>
+          <a:fillRef idx="3">
+            <a:schemeClr val="accent1"/>
+          </a:fillRef>
+          <a:effectRef idx="2">
+            <a:schemeClr val="accent1"/>
+          </a:effectRef>
+          <a:fontRef idx="minor">
+            <a:schemeClr val="lt1"/>
+          </a:fontRef>
+        </p:style>
+        <p:txBody>
+          <a:bodyPr rtlCol="0" anchor="ctr"/>
+          <a:lstStyle/>
+          <a:p>
+            <a:pPr algn="ctr"/>
+            <a:endParaRPr/>
+          </a:p>
+        </p:txBody>
+      </p:sp>
+      <p:sp>
+        <p:nvSpPr>
+          <p:cNvPr id="12" name="TextBox 11"/>
+          <p:cNvSpPr txBox="1"/>
+          <p:nvPr/>
+        </p:nvSpPr>
+        <p:spPr>
+          <a:xfrm>
+            <a:off x="438912" y="3209544"/>
+            <a:ext cx="1371600" cy="274320"/>
+          </a:xfrm>
+          <a:prstGeom prst="rect">
+            <a:avLst/>
+          </a:prstGeom>
+          <a:noFill/>
+        </p:spPr>
+        <p:txBody>
+          <a:bodyPr wrap="square">
+            <a:spAutoFit/>
+          </a:bodyPr>
+          <a:lstStyle/>
+          <a:p>
+            <a:pPr algn="l"/>
+            <a:r>
+              <a:rPr sz="1100" b="1" i="0">
+                <a:solidFill>
+                  <a:srgbClr val="00B4D8"/>
+                </a:solidFill>
+                <a:latin typeface="Calibri"/>
+              </a:rPr>
+              <a:t>03  Augment</a:t>
+            </a:r>
+          </a:p>
+        </p:txBody>
+      </p:sp>
+      <p:sp>
+        <p:nvSpPr>
+          <p:cNvPr id="13" name="TextBox 12"/>
+          <p:cNvSpPr txBox="1"/>
+          <p:nvPr/>
+        </p:nvSpPr>
+        <p:spPr>
+          <a:xfrm>
+            <a:off x="1737360" y="3209544"/>
+            <a:ext cx="6858000" cy="274320"/>
+          </a:xfrm>
+          <a:prstGeom prst="rect">
+            <a:avLst/>
+          </a:prstGeom>
+          <a:noFill/>
+        </p:spPr>
+        <p:txBody>
+          <a:bodyPr wrap="square">
+            <a:spAutoFit/>
+          </a:bodyPr>
+          <a:lstStyle/>
+          <a:p>
+            <a:pPr algn="l"/>
+            <a:r>
+              <a:rPr sz="1100" b="0" i="0">
+                <a:solidFill>
+                  <a:srgbClr val="CCDDEE"/>
+                </a:solidFill>
+                <a:latin typeface="Calibri"/>
+              </a:rPr>
+              <a:t>LLM receives the subgraph as grounded context with no hallucination risk</a:t>
+            </a:r>
+          </a:p>
+        </p:txBody>
+      </p:sp>
+      <p:sp>
+        <p:nvSpPr>
+          <p:cNvPr id="14" name="Rectangle 13"/>
+          <p:cNvSpPr/>
+          <p:nvPr/>
+        </p:nvSpPr>
+        <p:spPr>
+          <a:xfrm>
+            <a:off x="320040" y="3712464"/>
+            <a:ext cx="8503920" cy="530352"/>
+          </a:xfrm>
+          <a:prstGeom prst="rect">
+            <a:avLst/>
+          </a:prstGeom>
+          <a:solidFill>
+            <a:srgbClr val="052A52"/>
+          </a:solidFill>
+          <a:ln>
+            <a:noFill/>
+          </a:ln>
+        </p:spPr>
+        <p:style>
+          <a:lnRef idx="1">
+            <a:schemeClr val="accent1"/>
+          </a:lnRef>
+          <a:fillRef idx="3">
+            <a:schemeClr val="accent1"/>
+          </a:fillRef>
+          <a:effectRef idx="2">
+            <a:schemeClr val="accent1"/>
+          </a:effectRef>
+          <a:fontRef idx="minor">
+            <a:schemeClr val="lt1"/>
+          </a:fontRef>
+        </p:style>
+        <p:txBody>
+          <a:bodyPr rtlCol="0" anchor="ctr"/>
+          <a:lstStyle/>
+          <a:p>
+            <a:pPr algn="ctr"/>
+            <a:endParaRPr/>
+          </a:p>
+        </p:txBody>
+      </p:sp>
+      <p:sp>
+        <p:nvSpPr>
+          <p:cNvPr id="15" name="TextBox 14"/>
+          <p:cNvSpPr txBox="1"/>
+          <p:nvPr/>
+        </p:nvSpPr>
+        <p:spPr>
+          <a:xfrm>
+            <a:off x="438912" y="3831336"/>
+            <a:ext cx="1371600" cy="274320"/>
+          </a:xfrm>
+          <a:prstGeom prst="rect">
+            <a:avLst/>
+          </a:prstGeom>
+          <a:noFill/>
+        </p:spPr>
+        <p:txBody>
+          <a:bodyPr wrap="square">
+            <a:spAutoFit/>
+          </a:bodyPr>
+          <a:lstStyle/>
+          <a:p>
+            <a:pPr algn="l"/>
+            <a:r>
+              <a:rPr sz="1100" b="1" i="0">
+                <a:solidFill>
+                  <a:srgbClr val="00B4D8"/>
+                </a:solidFill>
+                <a:latin typeface="Calibri"/>
+              </a:rPr>
+              <a:t>04  Generate</a:t>
+            </a:r>
+          </a:p>
+        </p:txBody>
+      </p:sp>
+      <p:sp>
+        <p:nvSpPr>
+          <p:cNvPr id="16" name="TextBox 15"/>
+          <p:cNvSpPr txBox="1"/>
+          <p:nvPr/>
+        </p:nvSpPr>
+        <p:spPr>
+          <a:xfrm>
+            <a:off x="1737360" y="3831336"/>
+            <a:ext cx="6858000" cy="274320"/>
+          </a:xfrm>
+          <a:prstGeom prst="rect">
+            <a:avLst/>
+          </a:prstGeom>
+          <a:noFill/>
+        </p:spPr>
+        <p:txBody>
+          <a:bodyPr wrap="square">
+            <a:spAutoFit/>
+          </a:bodyPr>
+          <a:lstStyle/>
+          <a:p>
+            <a:pPr algn="l"/>
+            <a:r>
+              <a:rPr sz="1100" b="0" i="0">
+                <a:solidFill>
+                  <a:srgbClr val="CCDDEE"/>
+                </a:solidFill>
+                <a:latin typeface="Calibri"/>
+              </a:rPr>
+              <a:t>Model summarizes evidence, compares pipelines, surfaces repurposing leads</a:t>
+            </a:r>
+          </a:p>
+        </p:txBody>
+      </p:sp>
+      <p:sp>
+        <p:nvSpPr>
+          <p:cNvPr id="17" name="Rectangle 16"/>
+          <p:cNvSpPr/>
+          <p:nvPr/>
+        </p:nvSpPr>
+        <p:spPr>
+          <a:xfrm>
+            <a:off x="320040" y="4334256"/>
+            <a:ext cx="8503920" cy="530352"/>
+          </a:xfrm>
+          <a:prstGeom prst="rect">
+            <a:avLst/>
+          </a:prstGeom>
+          <a:solidFill>
+            <a:srgbClr val="052A52"/>
+          </a:solidFill>
+          <a:ln>
+            <a:noFill/>
+          </a:ln>
+        </p:spPr>
+        <p:style>
+          <a:lnRef idx="1">
+            <a:schemeClr val="accent1"/>
+          </a:lnRef>
+          <a:fillRef idx="3">
+            <a:schemeClr val="accent1"/>
+          </a:fillRef>
+          <a:effectRef idx="2">
+            <a:schemeClr val="accent1"/>
+          </a:effectRef>
+          <a:fontRef idx="minor">
+            <a:schemeClr val="lt1"/>
+          </a:fontRef>
+        </p:style>
+        <p:txBody>
+          <a:bodyPr rtlCol="0" anchor="ctr"/>
+          <a:lstStyle/>
+          <a:p>
+            <a:pPr algn="ctr"/>
+            <a:endParaRPr/>
+          </a:p>
+        </p:txBody>
+      </p:sp>
+      <p:sp>
+        <p:nvSpPr>
+          <p:cNvPr id="18" name="TextBox 17"/>
+          <p:cNvSpPr txBox="1"/>
+          <p:nvPr/>
+        </p:nvSpPr>
+        <p:spPr>
+          <a:xfrm>
+            <a:off x="438912" y="4453128"/>
+            <a:ext cx="1371600" cy="274320"/>
+          </a:xfrm>
+          <a:prstGeom prst="rect">
+            <a:avLst/>
+          </a:prstGeom>
+          <a:noFill/>
+        </p:spPr>
+        <p:txBody>
+          <a:bodyPr wrap="square">
+            <a:spAutoFit/>
+          </a:bodyPr>
+          <a:lstStyle/>
+          <a:p>
+            <a:pPr algn="l"/>
+            <a:r>
+              <a:rPr sz="1100" b="1" i="0">
+                <a:solidFill>
+                  <a:srgbClr val="00B4D8"/>
+                </a:solidFill>
+                <a:latin typeface="Calibri"/>
+              </a:rPr>
+              <a:t>05  Hypothesize</a:t>
+            </a:r>
+          </a:p>
+        </p:txBody>
+      </p:sp>
+      <p:sp>
+        <p:nvSpPr>
+          <p:cNvPr id="19" name="TextBox 18"/>
+          <p:cNvSpPr txBox="1"/>
+          <p:nvPr/>
+        </p:nvSpPr>
+        <p:spPr>
+          <a:xfrm>
+            <a:off x="1737360" y="4453128"/>
+            <a:ext cx="6858000" cy="274320"/>
+          </a:xfrm>
+          <a:prstGeom prst="rect">
+            <a:avLst/>
+          </a:prstGeom>
+          <a:noFill/>
+        </p:spPr>
+        <p:txBody>
+          <a:bodyPr wrap="square">
+            <a:spAutoFit/>
+          </a:bodyPr>
+          <a:lstStyle/>
+          <a:p>
+            <a:pPr algn="l"/>
+            <a:r>
+              <a:rPr sz="1100" b="0" i="0">
+                <a:solidFill>
+                  <a:srgbClr val="CCDDEE"/>
+                </a:solidFill>
+                <a:latin typeface="Calibri"/>
+              </a:rPr>
+              <a:t>Cross-condition and cross-sponsor patterns suggest novel research directions</a:t>
+            </a:r>
+          </a:p>
+        </p:txBody>
+      </p:sp>
+    </p:spTree>
+  </p:cSld>
+  <p:clrMapOvr>
+    <a:masterClrMapping/>
+  </p:clrMapOvr>
+</p:sld>
+</file>
+
+<file path=ppt/slides/slide21.xml><?xml version="1.0" encoding="utf-8"?>
+<p:sld xmlns:a="http://schemas.openxmlformats.org/drawingml/2006/main" xmlns:r="http://schemas.openxmlformats.org/officeDocument/2006/relationships" xmlns:p="http://schemas.openxmlformats.org/presentationml/2006/main">
+  <p:cSld>
+    <p:bg>
+      <p:bgPr>
+        <a:solidFill>
+          <a:srgbClr val="0D1B3E"/>
+        </a:solidFill>
+        <a:effectLst/>
+      </p:bgPr>
+    </p:bg>
+    <p:spTree>
+      <p:nvGrpSpPr>
+        <p:cNvPr id="1" name=""/>
+        <p:cNvGrpSpPr/>
+        <p:nvPr/>
+      </p:nvGrpSpPr>
+      <p:grpSpPr>
+        <a:xfrm>
+          <a:off x="0" y="0"/>
+          <a:ext cx="0" cy="0"/>
+          <a:chOff x="0" y="0"/>
+          <a:chExt cx="0" cy="0"/>
+        </a:xfrm>
+      </p:grpSpPr>
+      <p:sp>
+        <p:nvSpPr>
+          <p:cNvPr id="2" name="Rectangle 1"/>
+          <p:cNvSpPr/>
+          <p:nvPr/>
+        </p:nvSpPr>
+        <p:spPr>
+          <a:xfrm>
+            <a:off x="0" y="0"/>
+            <a:ext cx="9144000" cy="73152"/>
+          </a:xfrm>
+          <a:prstGeom prst="rect">
+            <a:avLst/>
+          </a:prstGeom>
+          <a:solidFill>
+            <a:srgbClr val="00B4D8"/>
+          </a:solidFill>
+          <a:ln>
+            <a:noFill/>
+          </a:ln>
+        </p:spPr>
+        <p:style>
+          <a:lnRef idx="1">
+            <a:schemeClr val="accent1"/>
+          </a:lnRef>
+          <a:fillRef idx="3">
+            <a:schemeClr val="accent1"/>
+          </a:fillRef>
+          <a:effectRef idx="2">
+            <a:schemeClr val="accent1"/>
+          </a:effectRef>
+          <a:fontRef idx="minor">
+            <a:schemeClr val="lt1"/>
+          </a:fontRef>
+        </p:style>
+        <p:txBody>
+          <a:bodyPr rtlCol="0" anchor="ctr"/>
+          <a:lstStyle/>
+          <a:p>
+            <a:pPr algn="ctr"/>
+            <a:endParaRPr/>
+          </a:p>
+        </p:txBody>
+      </p:sp>
+      <p:sp>
+        <p:nvSpPr>
+          <p:cNvPr id="3" name="TextBox 2"/>
+          <p:cNvSpPr txBox="1"/>
+          <p:nvPr/>
+        </p:nvSpPr>
+        <p:spPr>
+          <a:xfrm>
+            <a:off x="457200" y="320040"/>
+            <a:ext cx="7315200" cy="548640"/>
+          </a:xfrm>
+          <a:prstGeom prst="rect">
+            <a:avLst/>
+          </a:prstGeom>
+          <a:noFill/>
+        </p:spPr>
+        <p:txBody>
+          <a:bodyPr wrap="square">
+            <a:spAutoFit/>
+          </a:bodyPr>
+          <a:lstStyle/>
+          <a:p>
+            <a:pPr algn="l"/>
+            <a:r>
+              <a:rPr sz="3000" b="1" i="0">
+                <a:solidFill>
+                  <a:srgbClr val="FFFFFF"/>
+                </a:solidFill>
+                <a:latin typeface="Georgia"/>
+              </a:rPr>
+              <a:t>The stack behind this</a:t>
+            </a:r>
+          </a:p>
+        </p:txBody>
+      </p:sp>
+      <p:sp>
+        <p:nvSpPr>
+          <p:cNvPr id="4" name="Rectangle 3"/>
+          <p:cNvSpPr/>
+          <p:nvPr/>
+        </p:nvSpPr>
+        <p:spPr>
+          <a:xfrm>
+            <a:off x="457200" y="1005840"/>
+            <a:ext cx="1737360" cy="548640"/>
+          </a:xfrm>
+          <a:prstGeom prst="rect">
+            <a:avLst/>
+          </a:prstGeom>
+          <a:solidFill>
+            <a:srgbClr val="052A52"/>
+          </a:solidFill>
+          <a:ln>
+            <a:noFill/>
+          </a:ln>
+        </p:spPr>
+        <p:style>
+          <a:lnRef idx="1">
+            <a:schemeClr val="accent1"/>
+          </a:lnRef>
+          <a:fillRef idx="3">
+            <a:schemeClr val="accent1"/>
+          </a:fillRef>
+          <a:effectRef idx="2">
+            <a:schemeClr val="accent1"/>
+          </a:effectRef>
+          <a:fontRef idx="minor">
+            <a:schemeClr val="lt1"/>
+          </a:fontRef>
+        </p:style>
+        <p:txBody>
+          <a:bodyPr rtlCol="0" anchor="ctr"/>
+          <a:lstStyle/>
+          <a:p>
+            <a:pPr algn="ctr"/>
+            <a:endParaRPr/>
+          </a:p>
+        </p:txBody>
+      </p:sp>
+      <p:sp>
+        <p:nvSpPr>
+          <p:cNvPr id="5" name="TextBox 4"/>
+          <p:cNvSpPr txBox="1"/>
+          <p:nvPr/>
+        </p:nvSpPr>
+        <p:spPr>
+          <a:xfrm>
+            <a:off x="502920" y="1124712"/>
+            <a:ext cx="1645920" cy="274320"/>
+          </a:xfrm>
+          <a:prstGeom prst="rect">
+            <a:avLst/>
+          </a:prstGeom>
+          <a:noFill/>
+        </p:spPr>
+        <p:txBody>
+          <a:bodyPr wrap="square">
+            <a:spAutoFit/>
+          </a:bodyPr>
+          <a:lstStyle/>
+          <a:p>
+            <a:pPr algn="ctr"/>
+            <a:r>
+              <a:rPr sz="1100" b="1" i="0">
+                <a:solidFill>
+                  <a:srgbClr val="00B4D8"/>
+                </a:solidFill>
+                <a:latin typeface="Calibri"/>
+              </a:rPr>
+              <a:t>Data source</a:t>
+            </a:r>
+          </a:p>
+        </p:txBody>
+      </p:sp>
+      <p:sp>
+        <p:nvSpPr>
+          <p:cNvPr id="6" name="Rectangle 5"/>
+          <p:cNvSpPr/>
+          <p:nvPr/>
+        </p:nvSpPr>
+        <p:spPr>
+          <a:xfrm>
+            <a:off x="2331720" y="1005840"/>
+            <a:ext cx="6400800" cy="548640"/>
+          </a:xfrm>
+          <a:prstGeom prst="rect">
+            <a:avLst/>
+          </a:prstGeom>
+          <a:solidFill>
+            <a:srgbClr val="071F3A"/>
+          </a:solidFill>
+          <a:ln>
+            <a:noFill/>
+          </a:ln>
+        </p:spPr>
+        <p:style>
+          <a:lnRef idx="1">
+            <a:schemeClr val="accent1"/>
+          </a:lnRef>
+          <a:fillRef idx="3">
+            <a:schemeClr val="accent1"/>
+          </a:fillRef>
+          <a:effectRef idx="2">
+            <a:schemeClr val="accent1"/>
+          </a:effectRef>
+          <a:fontRef idx="minor">
+            <a:schemeClr val="lt1"/>
+          </a:fontRef>
+        </p:style>
+        <p:txBody>
+          <a:bodyPr rtlCol="0" anchor="ctr"/>
+          <a:lstStyle/>
+          <a:p>
+            <a:pPr algn="ctr"/>
+            <a:endParaRPr/>
+          </a:p>
+        </p:txBody>
+      </p:sp>
+      <p:sp>
+        <p:nvSpPr>
+          <p:cNvPr id="7" name="TextBox 6"/>
+          <p:cNvSpPr txBox="1"/>
+          <p:nvPr/>
+        </p:nvSpPr>
+        <p:spPr>
+          <a:xfrm>
+            <a:off x="2468880" y="1133856"/>
+            <a:ext cx="6126480" cy="274320"/>
+          </a:xfrm>
+          <a:prstGeom prst="rect">
+            <a:avLst/>
+          </a:prstGeom>
+          <a:noFill/>
+        </p:spPr>
+        <p:txBody>
+          <a:bodyPr wrap="square">
+            <a:spAutoFit/>
+          </a:bodyPr>
+          <a:lstStyle/>
+          <a:p>
+            <a:pPr algn="l"/>
+            <a:r>
+              <a:rPr sz="1150" b="0" i="0">
+                <a:solidFill>
+                  <a:srgbClr val="FFFFFF"/>
+                </a:solidFill>
+                <a:latin typeface="Calibri"/>
+              </a:rPr>
+              <a:t>ClinicalTrials.gov — full registry, 640K+ trial records</a:t>
+            </a:r>
+          </a:p>
+        </p:txBody>
+      </p:sp>
+      <p:sp>
+        <p:nvSpPr>
+          <p:cNvPr id="8" name="Rectangle 7"/>
+          <p:cNvSpPr/>
+          <p:nvPr/>
+        </p:nvSpPr>
+        <p:spPr>
+          <a:xfrm>
+            <a:off x="457200" y="1737360"/>
+            <a:ext cx="1737360" cy="548640"/>
+          </a:xfrm>
+          <a:prstGeom prst="rect">
+            <a:avLst/>
+          </a:prstGeom>
+          <a:solidFill>
+            <a:srgbClr val="052A52"/>
+          </a:solidFill>
+          <a:ln>
+            <a:noFill/>
+          </a:ln>
+        </p:spPr>
+        <p:style>
+          <a:lnRef idx="1">
+            <a:schemeClr val="accent1"/>
+          </a:lnRef>
+          <a:fillRef idx="3">
+            <a:schemeClr val="accent1"/>
+          </a:fillRef>
+          <a:effectRef idx="2">
+            <a:schemeClr val="accent1"/>
+          </a:effectRef>
+          <a:fontRef idx="minor">
+            <a:schemeClr val="lt1"/>
+          </a:fontRef>
+        </p:style>
+        <p:txBody>
+          <a:bodyPr rtlCol="0" anchor="ctr"/>
+          <a:lstStyle/>
+          <a:p>
+            <a:pPr algn="ctr"/>
+            <a:endParaRPr/>
+          </a:p>
+        </p:txBody>
+      </p:sp>
+      <p:sp>
+        <p:nvSpPr>
+          <p:cNvPr id="9" name="TextBox 8"/>
+          <p:cNvSpPr txBox="1"/>
+          <p:nvPr/>
+        </p:nvSpPr>
+        <p:spPr>
+          <a:xfrm>
+            <a:off x="502920" y="1856232"/>
+            <a:ext cx="1645920" cy="274320"/>
+          </a:xfrm>
+          <a:prstGeom prst="rect">
+            <a:avLst/>
+          </a:prstGeom>
+          <a:noFill/>
+        </p:spPr>
+        <p:txBody>
+          <a:bodyPr wrap="square">
+            <a:spAutoFit/>
+          </a:bodyPr>
+          <a:lstStyle/>
+          <a:p>
+            <a:pPr algn="ctr"/>
+            <a:r>
+              <a:rPr sz="1100" b="1" i="0">
+                <a:solidFill>
+                  <a:srgbClr val="00B4D8"/>
+                </a:solidFill>
+                <a:latin typeface="Calibri"/>
+              </a:rPr>
+              <a:t>Graph DB</a:t>
+            </a:r>
+          </a:p>
+        </p:txBody>
+      </p:sp>
+      <p:sp>
+        <p:nvSpPr>
+          <p:cNvPr id="10" name="Rectangle 9"/>
+          <p:cNvSpPr/>
+          <p:nvPr/>
+        </p:nvSpPr>
+        <p:spPr>
+          <a:xfrm>
+            <a:off x="2331720" y="1737360"/>
+            <a:ext cx="6400800" cy="548640"/>
+          </a:xfrm>
+          <a:prstGeom prst="rect">
+            <a:avLst/>
+          </a:prstGeom>
+          <a:solidFill>
+            <a:srgbClr val="071F3A"/>
+          </a:solidFill>
+          <a:ln>
+            <a:noFill/>
+          </a:ln>
+        </p:spPr>
+        <p:style>
+          <a:lnRef idx="1">
+            <a:schemeClr val="accent1"/>
+          </a:lnRef>
+          <a:fillRef idx="3">
+            <a:schemeClr val="accent1"/>
+          </a:fillRef>
+          <a:effectRef idx="2">
+            <a:schemeClr val="accent1"/>
+          </a:effectRef>
+          <a:fontRef idx="minor">
+            <a:schemeClr val="lt1"/>
+          </a:fontRef>
+        </p:style>
+        <p:txBody>
+          <a:bodyPr rtlCol="0" anchor="ctr"/>
+          <a:lstStyle/>
+          <a:p>
+            <a:pPr algn="ctr"/>
+            <a:endParaRPr/>
+          </a:p>
+        </p:txBody>
+      </p:sp>
+      <p:sp>
+        <p:nvSpPr>
+          <p:cNvPr id="11" name="TextBox 10"/>
+          <p:cNvSpPr txBox="1"/>
+          <p:nvPr/>
+        </p:nvSpPr>
+        <p:spPr>
+          <a:xfrm>
+            <a:off x="2468880" y="1865376"/>
+            <a:ext cx="6126480" cy="274320"/>
+          </a:xfrm>
+          <a:prstGeom prst="rect">
+            <a:avLst/>
+          </a:prstGeom>
+          <a:noFill/>
+        </p:spPr>
+        <p:txBody>
+          <a:bodyPr wrap="square">
+            <a:spAutoFit/>
+          </a:bodyPr>
+          <a:lstStyle/>
+          <a:p>
+            <a:pPr algn="l"/>
+            <a:r>
+              <a:rPr sz="1150" b="0" i="0">
+                <a:solidFill>
+                  <a:srgbClr val="FFFFFF"/>
+                </a:solidFill>
+                <a:latin typeface="Calibri"/>
+              </a:rPr>
+              <a:t>Neo4j — 6 node types, 5 relationship types, Cypher queries</a:t>
+            </a:r>
+          </a:p>
+        </p:txBody>
+      </p:sp>
+      <p:sp>
+        <p:nvSpPr>
+          <p:cNvPr id="12" name="Rectangle 11"/>
+          <p:cNvSpPr/>
+          <p:nvPr/>
+        </p:nvSpPr>
+        <p:spPr>
+          <a:xfrm>
+            <a:off x="457200" y="2468880"/>
+            <a:ext cx="1737360" cy="548640"/>
+          </a:xfrm>
+          <a:prstGeom prst="rect">
+            <a:avLst/>
+          </a:prstGeom>
+          <a:solidFill>
+            <a:srgbClr val="052A52"/>
+          </a:solidFill>
+          <a:ln>
+            <a:noFill/>
+          </a:ln>
+        </p:spPr>
+        <p:style>
+          <a:lnRef idx="1">
+            <a:schemeClr val="accent1"/>
+          </a:lnRef>
+          <a:fillRef idx="3">
+            <a:schemeClr val="accent1"/>
+          </a:fillRef>
+          <a:effectRef idx="2">
+            <a:schemeClr val="accent1"/>
+          </a:effectRef>
+          <a:fontRef idx="minor">
+            <a:schemeClr val="lt1"/>
+          </a:fontRef>
+        </p:style>
+        <p:txBody>
+          <a:bodyPr rtlCol="0" anchor="ctr"/>
+          <a:lstStyle/>
+          <a:p>
+            <a:pPr algn="ctr"/>
+            <a:endParaRPr/>
+          </a:p>
+        </p:txBody>
+      </p:sp>
+      <p:sp>
+        <p:nvSpPr>
+          <p:cNvPr id="13" name="TextBox 12"/>
+          <p:cNvSpPr txBox="1"/>
+          <p:nvPr/>
+        </p:nvSpPr>
+        <p:spPr>
+          <a:xfrm>
+            <a:off x="502920" y="2587752"/>
+            <a:ext cx="1645920" cy="274320"/>
+          </a:xfrm>
+          <a:prstGeom prst="rect">
+            <a:avLst/>
+          </a:prstGeom>
+          <a:noFill/>
+        </p:spPr>
+        <p:txBody>
+          <a:bodyPr wrap="square">
+            <a:spAutoFit/>
+          </a:bodyPr>
+          <a:lstStyle/>
+          <a:p>
+            <a:pPr algn="ctr"/>
+            <a:r>
+              <a:rPr sz="1100" b="1" i="0">
+                <a:solidFill>
+                  <a:srgbClr val="00B4D8"/>
+                </a:solidFill>
+                <a:latin typeface="Calibri"/>
+              </a:rPr>
+              <a:t>Extraction</a:t>
+            </a:r>
+          </a:p>
+        </p:txBody>
+      </p:sp>
+      <p:sp>
+        <p:nvSpPr>
+          <p:cNvPr id="14" name="Rectangle 13"/>
+          <p:cNvSpPr/>
+          <p:nvPr/>
+        </p:nvSpPr>
+        <p:spPr>
+          <a:xfrm>
+            <a:off x="2331720" y="2468880"/>
+            <a:ext cx="6400800" cy="548640"/>
+          </a:xfrm>
+          <a:prstGeom prst="rect">
+            <a:avLst/>
+          </a:prstGeom>
+          <a:solidFill>
+            <a:srgbClr val="071F3A"/>
+          </a:solidFill>
+          <a:ln>
+            <a:noFill/>
+          </a:ln>
+        </p:spPr>
+        <p:style>
+          <a:lnRef idx="1">
+            <a:schemeClr val="accent1"/>
+          </a:lnRef>
+          <a:fillRef idx="3">
+            <a:schemeClr val="accent1"/>
+          </a:fillRef>
+          <a:effectRef idx="2">
+            <a:schemeClr val="accent1"/>
+          </a:effectRef>
+          <a:fontRef idx="minor">
+            <a:schemeClr val="lt1"/>
+          </a:fontRef>
+        </p:style>
+        <p:txBody>
+          <a:bodyPr rtlCol="0" anchor="ctr"/>
+          <a:lstStyle/>
+          <a:p>
+            <a:pPr algn="ctr"/>
+            <a:endParaRPr/>
+          </a:p>
+        </p:txBody>
+      </p:sp>
+      <p:sp>
+        <p:nvSpPr>
+          <p:cNvPr id="15" name="TextBox 14"/>
+          <p:cNvSpPr txBox="1"/>
+          <p:nvPr/>
+        </p:nvSpPr>
+        <p:spPr>
+          <a:xfrm>
+            <a:off x="2468880" y="2596896"/>
+            <a:ext cx="6126480" cy="274320"/>
+          </a:xfrm>
+          <a:prstGeom prst="rect">
+            <a:avLst/>
+          </a:prstGeom>
+          <a:noFill/>
+        </p:spPr>
+        <p:txBody>
+          <a:bodyPr wrap="square">
+            <a:spAutoFit/>
+          </a:bodyPr>
+          <a:lstStyle/>
+          <a:p>
+            <a:pPr algn="l"/>
+            <a:r>
+              <a:rPr sz="1150" b="0" i="0">
+                <a:solidFill>
+                  <a:srgbClr val="FFFFFF"/>
+                </a:solidFill>
+                <a:latin typeface="Calibri"/>
+              </a:rPr>
+              <a:t>Python · pandas · networkx · python-louvain</a:t>
+            </a:r>
+          </a:p>
+        </p:txBody>
+      </p:sp>
+      <p:sp>
+        <p:nvSpPr>
+          <p:cNvPr id="16" name="Rectangle 15"/>
+          <p:cNvSpPr/>
+          <p:nvPr/>
+        </p:nvSpPr>
+        <p:spPr>
+          <a:xfrm>
+            <a:off x="457200" y="3200400"/>
+            <a:ext cx="1737360" cy="548640"/>
+          </a:xfrm>
+          <a:prstGeom prst="rect">
+            <a:avLst/>
+          </a:prstGeom>
+          <a:solidFill>
+            <a:srgbClr val="052A52"/>
+          </a:solidFill>
+          <a:ln>
+            <a:noFill/>
+          </a:ln>
+        </p:spPr>
+        <p:style>
+          <a:lnRef idx="1">
+            <a:schemeClr val="accent1"/>
+          </a:lnRef>
+          <a:fillRef idx="3">
+            <a:schemeClr val="accent1"/>
+          </a:fillRef>
+          <a:effectRef idx="2">
+            <a:schemeClr val="accent1"/>
+          </a:effectRef>
+          <a:fontRef idx="minor">
+            <a:schemeClr val="lt1"/>
+          </a:fontRef>
+        </p:style>
+        <p:txBody>
+          <a:bodyPr rtlCol="0" anchor="ctr"/>
+          <a:lstStyle/>
+          <a:p>
+            <a:pPr algn="ctr"/>
+            <a:endParaRPr/>
+          </a:p>
+        </p:txBody>
+      </p:sp>
+      <p:sp>
+        <p:nvSpPr>
+          <p:cNvPr id="17" name="TextBox 16"/>
+          <p:cNvSpPr txBox="1"/>
+          <p:nvPr/>
+        </p:nvSpPr>
+        <p:spPr>
+          <a:xfrm>
+            <a:off x="502920" y="3319272"/>
+            <a:ext cx="1645920" cy="274320"/>
+          </a:xfrm>
+          <a:prstGeom prst="rect">
+            <a:avLst/>
+          </a:prstGeom>
+          <a:noFill/>
+        </p:spPr>
+        <p:txBody>
+          <a:bodyPr wrap="square">
+            <a:spAutoFit/>
+          </a:bodyPr>
+          <a:lstStyle/>
+          <a:p>
+            <a:pPr algn="ctr"/>
+            <a:r>
+              <a:rPr sz="1100" b="1" i="0">
+                <a:solidFill>
+                  <a:srgbClr val="00B4D8"/>
+                </a:solidFill>
+                <a:latin typeface="Calibri"/>
+              </a:rPr>
+              <a:t>Visualization</a:t>
+            </a:r>
+          </a:p>
+        </p:txBody>
+      </p:sp>
+      <p:sp>
+        <p:nvSpPr>
+          <p:cNvPr id="18" name="Rectangle 17"/>
+          <p:cNvSpPr/>
+          <p:nvPr/>
+        </p:nvSpPr>
+        <p:spPr>
+          <a:xfrm>
+            <a:off x="2331720" y="3200400"/>
+            <a:ext cx="6400800" cy="548640"/>
+          </a:xfrm>
+          <a:prstGeom prst="rect">
+            <a:avLst/>
+          </a:prstGeom>
+          <a:solidFill>
+            <a:srgbClr val="071F3A"/>
+          </a:solidFill>
+          <a:ln>
+            <a:noFill/>
+          </a:ln>
+        </p:spPr>
+        <p:style>
+          <a:lnRef idx="1">
+            <a:schemeClr val="accent1"/>
+          </a:lnRef>
+          <a:fillRef idx="3">
+            <a:schemeClr val="accent1"/>
+          </a:fillRef>
+          <a:effectRef idx="2">
+            <a:schemeClr val="accent1"/>
+          </a:effectRef>
+          <a:fontRef idx="minor">
+            <a:schemeClr val="lt1"/>
+          </a:fontRef>
+        </p:style>
+        <p:txBody>
+          <a:bodyPr rtlCol="0" anchor="ctr"/>
+          <a:lstStyle/>
+          <a:p>
+            <a:pPr algn="ctr"/>
+            <a:endParaRPr/>
+          </a:p>
+        </p:txBody>
+      </p:sp>
+      <p:sp>
+        <p:nvSpPr>
+          <p:cNvPr id="19" name="TextBox 18"/>
+          <p:cNvSpPr txBox="1"/>
+          <p:nvPr/>
+        </p:nvSpPr>
+        <p:spPr>
+          <a:xfrm>
+            <a:off x="2468880" y="3328416"/>
+            <a:ext cx="6126480" cy="274320"/>
+          </a:xfrm>
+          <a:prstGeom prst="rect">
+            <a:avLst/>
+          </a:prstGeom>
+          <a:noFill/>
+        </p:spPr>
+        <p:txBody>
+          <a:bodyPr wrap="square">
+            <a:spAutoFit/>
+          </a:bodyPr>
+          <a:lstStyle/>
+          <a:p>
+            <a:pPr algn="l"/>
+            <a:r>
+              <a:rPr sz="1150" b="0" i="0">
+                <a:solidFill>
+                  <a:srgbClr val="FFFFFF"/>
+                </a:solidFill>
+                <a:latin typeface="Calibri"/>
+              </a:rPr>
+              <a:t>matplotlib · seaborn · plotly-ready</a:t>
+            </a:r>
+          </a:p>
+        </p:txBody>
+      </p:sp>
+      <p:sp>
+        <p:nvSpPr>
+          <p:cNvPr id="20" name="Rectangle 19"/>
+          <p:cNvSpPr/>
+          <p:nvPr/>
+        </p:nvSpPr>
+        <p:spPr>
+          <a:xfrm>
+            <a:off x="457200" y="3931920"/>
+            <a:ext cx="1737360" cy="548640"/>
+          </a:xfrm>
+          <a:prstGeom prst="rect">
+            <a:avLst/>
+          </a:prstGeom>
+          <a:solidFill>
+            <a:srgbClr val="052A52"/>
+          </a:solidFill>
+          <a:ln>
+            <a:noFill/>
+          </a:ln>
+        </p:spPr>
+        <p:style>
+          <a:lnRef idx="1">
+            <a:schemeClr val="accent1"/>
+          </a:lnRef>
+          <a:fillRef idx="3">
+            <a:schemeClr val="accent1"/>
+          </a:fillRef>
+          <a:effectRef idx="2">
+            <a:schemeClr val="accent1"/>
+          </a:effectRef>
+          <a:fontRef idx="minor">
+            <a:schemeClr val="lt1"/>
+          </a:fontRef>
+        </p:style>
+        <p:txBody>
+          <a:bodyPr rtlCol="0" anchor="ctr"/>
+          <a:lstStyle/>
+          <a:p>
+            <a:pPr algn="ctr"/>
+            <a:endParaRPr/>
+          </a:p>
+        </p:txBody>
+      </p:sp>
+      <p:sp>
+        <p:nvSpPr>
+          <p:cNvPr id="21" name="TextBox 20"/>
+          <p:cNvSpPr txBox="1"/>
+          <p:nvPr/>
+        </p:nvSpPr>
+        <p:spPr>
+          <a:xfrm>
+            <a:off x="502920" y="4050792"/>
+            <a:ext cx="1645920" cy="274320"/>
+          </a:xfrm>
+          <a:prstGeom prst="rect">
+            <a:avLst/>
+          </a:prstGeom>
+          <a:noFill/>
+        </p:spPr>
+        <p:txBody>
+          <a:bodyPr wrap="square">
+            <a:spAutoFit/>
+          </a:bodyPr>
+          <a:lstStyle/>
+          <a:p>
+            <a:pPr algn="ctr"/>
+            <a:r>
+              <a:rPr sz="1100" b="1" i="0">
+                <a:solidFill>
+                  <a:srgbClr val="00B4D8"/>
+                </a:solidFill>
+                <a:latin typeface="Calibri"/>
+              </a:rPr>
+              <a:t>Next stage</a:t>
+            </a:r>
+          </a:p>
+        </p:txBody>
+      </p:sp>
+      <p:sp>
+        <p:nvSpPr>
+          <p:cNvPr id="22" name="Rectangle 21"/>
+          <p:cNvSpPr/>
+          <p:nvPr/>
+        </p:nvSpPr>
+        <p:spPr>
+          <a:xfrm>
+            <a:off x="2331720" y="3931920"/>
+            <a:ext cx="6400800" cy="548640"/>
+          </a:xfrm>
+          <a:prstGeom prst="rect">
+            <a:avLst/>
+          </a:prstGeom>
+          <a:solidFill>
+            <a:srgbClr val="071F3A"/>
+          </a:solidFill>
+          <a:ln>
+            <a:noFill/>
+          </a:ln>
+        </p:spPr>
+        <p:style>
+          <a:lnRef idx="1">
+            <a:schemeClr val="accent1"/>
+          </a:lnRef>
+          <a:fillRef idx="3">
+            <a:schemeClr val="accent1"/>
+          </a:fillRef>
+          <a:effectRef idx="2">
+            <a:schemeClr val="accent1"/>
+          </a:effectRef>
+          <a:fontRef idx="minor">
+            <a:schemeClr val="lt1"/>
+          </a:fontRef>
+        </p:style>
+        <p:txBody>
+          <a:bodyPr rtlCol="0" anchor="ctr"/>
+          <a:lstStyle/>
+          <a:p>
+            <a:pPr algn="ctr"/>
+            <a:endParaRPr/>
+          </a:p>
+        </p:txBody>
+      </p:sp>
+      <p:sp>
+        <p:nvSpPr>
+          <p:cNvPr id="23" name="TextBox 22"/>
+          <p:cNvSpPr txBox="1"/>
+          <p:nvPr/>
+        </p:nvSpPr>
+        <p:spPr>
+          <a:xfrm>
+            <a:off x="2468880" y="4059936"/>
+            <a:ext cx="6126480" cy="274320"/>
+          </a:xfrm>
+          <a:prstGeom prst="rect">
+            <a:avLst/>
+          </a:prstGeom>
+          <a:noFill/>
+        </p:spPr>
+        <p:txBody>
+          <a:bodyPr wrap="square">
+            <a:spAutoFit/>
+          </a:bodyPr>
+          <a:lstStyle/>
+          <a:p>
+            <a:pPr algn="l"/>
+            <a:r>
+              <a:rPr sz="1150" b="0" i="0">
+                <a:solidFill>
+                  <a:srgbClr val="FFFFFF"/>
+                </a:solidFill>
+                <a:latin typeface="Calibri"/>
+              </a:rPr>
+              <a:t>GraphRAG pipeline → LLM summarization + hypothesis generation</a:t>
+            </a:r>
+          </a:p>
+        </p:txBody>
+      </p:sp>
+      <p:sp>
+        <p:nvSpPr>
+          <p:cNvPr id="24" name="Rectangle 23"/>
+          <p:cNvSpPr/>
+          <p:nvPr/>
+        </p:nvSpPr>
+        <p:spPr>
+          <a:xfrm>
+            <a:off x="457200" y="4572000"/>
+            <a:ext cx="8229600" cy="402336"/>
+          </a:xfrm>
+          <a:prstGeom prst="rect">
+            <a:avLst/>
+          </a:prstGeom>
+          <a:solidFill>
+            <a:srgbClr val="00B4D8"/>
+          </a:solidFill>
+          <a:ln>
+            <a:noFill/>
+          </a:ln>
+        </p:spPr>
+        <p:style>
+          <a:lnRef idx="1">
+            <a:schemeClr val="accent1"/>
+          </a:lnRef>
+          <a:fillRef idx="3">
+            <a:schemeClr val="accent1"/>
+          </a:fillRef>
+          <a:effectRef idx="2">
+            <a:schemeClr val="accent1"/>
+          </a:effectRef>
+          <a:fontRef idx="minor">
+            <a:schemeClr val="lt1"/>
+          </a:fontRef>
+        </p:style>
+        <p:txBody>
+          <a:bodyPr rtlCol="0" anchor="ctr"/>
+          <a:lstStyle/>
+          <a:p>
+            <a:pPr algn="ctr"/>
+            <a:endParaRPr/>
+          </a:p>
+        </p:txBody>
+      </p:sp>
+      <p:sp>
+        <p:nvSpPr>
+          <p:cNvPr id="25" name="TextBox 24"/>
+          <p:cNvSpPr txBox="1"/>
+          <p:nvPr/>
+        </p:nvSpPr>
+        <p:spPr>
+          <a:xfrm>
+            <a:off x="548640" y="4608576"/>
+            <a:ext cx="8046720" cy="329184"/>
+          </a:xfrm>
+          <a:prstGeom prst="rect">
+            <a:avLst/>
+          </a:prstGeom>
+          <a:noFill/>
+        </p:spPr>
+        <p:txBody>
+          <a:bodyPr wrap="square">
+            <a:spAutoFit/>
+          </a:bodyPr>
+          <a:lstStyle/>
+          <a:p>
+            <a:pPr algn="ctr"/>
+            <a:r>
+              <a:rPr sz="1300" b="1" i="0">
+                <a:solidFill>
+                  <a:srgbClr val="0D1B3E"/>
+                </a:solidFill>
+                <a:latin typeface="Calibri"/>
+              </a:rPr>
+              <a:t>Interested in applying this to your therapeutic area?  Let's connect →</a:t>
+            </a:r>
+          </a:p>
+        </p:txBody>
+      </p:sp>
     </p:spTree>
   </p:cSld>
   <p:clrMapOvr>
